--- a/MCP_Sathish_99_review2.pptx
+++ b/MCP_Sathish_99_review2.pptx
@@ -5,21 +5,12 @@
     <p:sldMasterId id="2147483659" r:id="rId1"/>
   </p:sldMasterIdLst>
   <p:notesMasterIdLst>
-    <p:notesMasterId r:id="rId14"/>
+    <p:notesMasterId r:id="rId5"/>
   </p:notesMasterIdLst>
   <p:sldIdLst>
     <p:sldId id="270" r:id="rId2"/>
-    <p:sldId id="257" r:id="rId3"/>
-    <p:sldId id="258" r:id="rId4"/>
-    <p:sldId id="284" r:id="rId5"/>
-    <p:sldId id="274" r:id="rId6"/>
-    <p:sldId id="285" r:id="rId7"/>
-    <p:sldId id="286" r:id="rId8"/>
-    <p:sldId id="287" r:id="rId9"/>
-    <p:sldId id="288" r:id="rId10"/>
-    <p:sldId id="289" r:id="rId11"/>
-    <p:sldId id="273" r:id="rId12"/>
-    <p:sldId id="275" r:id="rId13"/>
+    <p:sldId id="272" r:id="rId3"/>
+    <p:sldId id="273" r:id="rId4"/>
   </p:sldIdLst>
   <p:sldSz cx="9144000" cy="5143500" type="screen16x9"/>
   <p:notesSz cx="6858000" cy="9144000"/>
@@ -816,318 +807,6 @@
 </p:notes>
 </file>
 
-<file path=ppt/notesSlides/notesSlide2.xml><?xml version="1.0" encoding="utf-8"?>
-<p:notes xmlns:a="http://schemas.openxmlformats.org/drawingml/2006/main" xmlns:r="http://schemas.openxmlformats.org/officeDocument/2006/relationships" xmlns:p="http://schemas.openxmlformats.org/presentationml/2006/main" showMasterSp="0" showMasterPhAnim="0">
-  <p:cSld>
-    <p:spTree>
-      <p:nvGrpSpPr>
-        <p:cNvPr id="1" name="Shape 60"/>
-        <p:cNvGrpSpPr/>
-        <p:nvPr/>
-      </p:nvGrpSpPr>
-      <p:grpSpPr>
-        <a:xfrm>
-          <a:off x="0" y="0"/>
-          <a:ext cx="0" cy="0"/>
-          <a:chOff x="0" y="0"/>
-          <a:chExt cx="0" cy="0"/>
-        </a:xfrm>
-      </p:grpSpPr>
-      <p:sp>
-        <p:nvSpPr>
-          <p:cNvPr id="61" name="Google Shape;61;g3b45f8a42a8_0_8:notes"/>
-          <p:cNvSpPr>
-            <a:spLocks noGrp="1" noRot="1" noChangeAspect="1"/>
-          </p:cNvSpPr>
-          <p:nvPr>
-            <p:ph type="sldImg" idx="2"/>
-          </p:nvPr>
-        </p:nvSpPr>
-        <p:spPr>
-          <a:xfrm>
-            <a:off x="381000" y="685800"/>
-            <a:ext cx="6096000" cy="3429000"/>
-          </a:xfrm>
-          <a:custGeom>
-            <a:avLst/>
-            <a:gdLst/>
-            <a:ahLst/>
-            <a:cxnLst/>
-            <a:rect l="l" t="t" r="r" b="b"/>
-            <a:pathLst>
-              <a:path w="120000" h="120000" extrusionOk="0">
-                <a:moveTo>
-                  <a:pt x="0" y="0"/>
-                </a:moveTo>
-                <a:lnTo>
-                  <a:pt x="120000" y="0"/>
-                </a:lnTo>
-                <a:lnTo>
-                  <a:pt x="120000" y="120000"/>
-                </a:lnTo>
-                <a:lnTo>
-                  <a:pt x="0" y="120000"/>
-                </a:lnTo>
-                <a:close/>
-              </a:path>
-            </a:pathLst>
-          </a:custGeom>
-        </p:spPr>
-      </p:sp>
-      <p:sp>
-        <p:nvSpPr>
-          <p:cNvPr id="62" name="Google Shape;62;g3b45f8a42a8_0_8:notes"/>
-          <p:cNvSpPr txBox="1">
-            <a:spLocks noGrp="1"/>
-          </p:cNvSpPr>
-          <p:nvPr>
-            <p:ph type="body" idx="1"/>
-          </p:nvPr>
-        </p:nvSpPr>
-        <p:spPr>
-          <a:xfrm>
-            <a:off x="685800" y="4343400"/>
-            <a:ext cx="5486400" cy="4114800"/>
-          </a:xfrm>
-          <a:prstGeom prst="rect">
-            <a:avLst/>
-          </a:prstGeom>
-        </p:spPr>
-        <p:txBody>
-          <a:bodyPr spcFirstLastPara="1" wrap="square" lIns="91425" tIns="91425" rIns="91425" bIns="91425" anchor="t" anchorCtr="0">
-            <a:noAutofit/>
-          </a:bodyPr>
-          <a:lstStyle/>
-          <a:p>
-            <a:pPr marL="0" lvl="0" indent="0" algn="l" rtl="0">
-              <a:spcBef>
-                <a:spcPts val="0"/>
-              </a:spcBef>
-              <a:spcAft>
-                <a:spcPts val="0"/>
-              </a:spcAft>
-              <a:buNone/>
-            </a:pPr>
-            <a:endParaRPr/>
-          </a:p>
-        </p:txBody>
-      </p:sp>
-    </p:spTree>
-  </p:cSld>
-  <p:clrMapOvr>
-    <a:masterClrMapping/>
-  </p:clrMapOvr>
-</p:notes>
-</file>
-
-<file path=ppt/notesSlides/notesSlide3.xml><?xml version="1.0" encoding="utf-8"?>
-<p:notes xmlns:a="http://schemas.openxmlformats.org/drawingml/2006/main" xmlns:r="http://schemas.openxmlformats.org/officeDocument/2006/relationships" xmlns:p="http://schemas.openxmlformats.org/presentationml/2006/main" showMasterSp="0" showMasterPhAnim="0">
-  <p:cSld>
-    <p:spTree>
-      <p:nvGrpSpPr>
-        <p:cNvPr id="1" name="Shape 66"/>
-        <p:cNvGrpSpPr/>
-        <p:nvPr/>
-      </p:nvGrpSpPr>
-      <p:grpSpPr>
-        <a:xfrm>
-          <a:off x="0" y="0"/>
-          <a:ext cx="0" cy="0"/>
-          <a:chOff x="0" y="0"/>
-          <a:chExt cx="0" cy="0"/>
-        </a:xfrm>
-      </p:grpSpPr>
-      <p:sp>
-        <p:nvSpPr>
-          <p:cNvPr id="67" name="Google Shape;67;g3b45f8a42a8_0_21:notes"/>
-          <p:cNvSpPr>
-            <a:spLocks noGrp="1" noRot="1" noChangeAspect="1"/>
-          </p:cNvSpPr>
-          <p:nvPr>
-            <p:ph type="sldImg" idx="2"/>
-          </p:nvPr>
-        </p:nvSpPr>
-        <p:spPr>
-          <a:xfrm>
-            <a:off x="381000" y="685800"/>
-            <a:ext cx="6096000" cy="3429000"/>
-          </a:xfrm>
-          <a:custGeom>
-            <a:avLst/>
-            <a:gdLst/>
-            <a:ahLst/>
-            <a:cxnLst/>
-            <a:rect l="l" t="t" r="r" b="b"/>
-            <a:pathLst>
-              <a:path w="120000" h="120000" extrusionOk="0">
-                <a:moveTo>
-                  <a:pt x="0" y="0"/>
-                </a:moveTo>
-                <a:lnTo>
-                  <a:pt x="120000" y="0"/>
-                </a:lnTo>
-                <a:lnTo>
-                  <a:pt x="120000" y="120000"/>
-                </a:lnTo>
-                <a:lnTo>
-                  <a:pt x="0" y="120000"/>
-                </a:lnTo>
-                <a:close/>
-              </a:path>
-            </a:pathLst>
-          </a:custGeom>
-        </p:spPr>
-      </p:sp>
-      <p:sp>
-        <p:nvSpPr>
-          <p:cNvPr id="68" name="Google Shape;68;g3b45f8a42a8_0_21:notes"/>
-          <p:cNvSpPr txBox="1">
-            <a:spLocks noGrp="1"/>
-          </p:cNvSpPr>
-          <p:nvPr>
-            <p:ph type="body" idx="1"/>
-          </p:nvPr>
-        </p:nvSpPr>
-        <p:spPr>
-          <a:xfrm>
-            <a:off x="685800" y="4343400"/>
-            <a:ext cx="5486400" cy="4114800"/>
-          </a:xfrm>
-          <a:prstGeom prst="rect">
-            <a:avLst/>
-          </a:prstGeom>
-        </p:spPr>
-        <p:txBody>
-          <a:bodyPr spcFirstLastPara="1" wrap="square" lIns="91425" tIns="91425" rIns="91425" bIns="91425" anchor="t" anchorCtr="0">
-            <a:noAutofit/>
-          </a:bodyPr>
-          <a:lstStyle/>
-          <a:p>
-            <a:pPr marL="0" lvl="0" indent="0" algn="l" rtl="0">
-              <a:spcBef>
-                <a:spcPts val="0"/>
-              </a:spcBef>
-              <a:spcAft>
-                <a:spcPts val="0"/>
-              </a:spcAft>
-              <a:buNone/>
-            </a:pPr>
-            <a:endParaRPr/>
-          </a:p>
-        </p:txBody>
-      </p:sp>
-    </p:spTree>
-  </p:cSld>
-  <p:clrMapOvr>
-    <a:masterClrMapping/>
-  </p:clrMapOvr>
-</p:notes>
-</file>
-
-<file path=ppt/notesSlides/notesSlide4.xml><?xml version="1.0" encoding="utf-8"?>
-<p:notes xmlns:a="http://schemas.openxmlformats.org/drawingml/2006/main" xmlns:r="http://schemas.openxmlformats.org/officeDocument/2006/relationships" xmlns:p="http://schemas.openxmlformats.org/presentationml/2006/main" showMasterSp="0" showMasterPhAnim="0">
-  <p:cSld>
-    <p:spTree>
-      <p:nvGrpSpPr>
-        <p:cNvPr id="1" name="Shape 72"/>
-        <p:cNvGrpSpPr/>
-        <p:nvPr/>
-      </p:nvGrpSpPr>
-      <p:grpSpPr>
-        <a:xfrm>
-          <a:off x="0" y="0"/>
-          <a:ext cx="0" cy="0"/>
-          <a:chOff x="0" y="0"/>
-          <a:chExt cx="0" cy="0"/>
-        </a:xfrm>
-      </p:grpSpPr>
-      <p:sp>
-        <p:nvSpPr>
-          <p:cNvPr id="73" name="Google Shape;73;g3b462991b92_0_62:notes"/>
-          <p:cNvSpPr>
-            <a:spLocks noGrp="1" noRot="1" noChangeAspect="1"/>
-          </p:cNvSpPr>
-          <p:nvPr>
-            <p:ph type="sldImg" idx="2"/>
-          </p:nvPr>
-        </p:nvSpPr>
-        <p:spPr>
-          <a:xfrm>
-            <a:off x="381000" y="685800"/>
-            <a:ext cx="6096000" cy="3429000"/>
-          </a:xfrm>
-          <a:custGeom>
-            <a:avLst/>
-            <a:gdLst/>
-            <a:ahLst/>
-            <a:cxnLst/>
-            <a:rect l="l" t="t" r="r" b="b"/>
-            <a:pathLst>
-              <a:path w="120000" h="120000" extrusionOk="0">
-                <a:moveTo>
-                  <a:pt x="0" y="0"/>
-                </a:moveTo>
-                <a:lnTo>
-                  <a:pt x="120000" y="0"/>
-                </a:lnTo>
-                <a:lnTo>
-                  <a:pt x="120000" y="120000"/>
-                </a:lnTo>
-                <a:lnTo>
-                  <a:pt x="0" y="120000"/>
-                </a:lnTo>
-                <a:close/>
-              </a:path>
-            </a:pathLst>
-          </a:custGeom>
-        </p:spPr>
-      </p:sp>
-      <p:sp>
-        <p:nvSpPr>
-          <p:cNvPr id="74" name="Google Shape;74;g3b462991b92_0_62:notes"/>
-          <p:cNvSpPr txBox="1">
-            <a:spLocks noGrp="1"/>
-          </p:cNvSpPr>
-          <p:nvPr>
-            <p:ph type="body" idx="1"/>
-          </p:nvPr>
-        </p:nvSpPr>
-        <p:spPr>
-          <a:xfrm>
-            <a:off x="685800" y="4343400"/>
-            <a:ext cx="5486400" cy="4114800"/>
-          </a:xfrm>
-          <a:prstGeom prst="rect">
-            <a:avLst/>
-          </a:prstGeom>
-        </p:spPr>
-        <p:txBody>
-          <a:bodyPr spcFirstLastPara="1" wrap="square" lIns="91425" tIns="91425" rIns="91425" bIns="91425" anchor="t" anchorCtr="0">
-            <a:noAutofit/>
-          </a:bodyPr>
-          <a:lstStyle/>
-          <a:p>
-            <a:pPr marL="0" lvl="0" indent="0" algn="l" rtl="0">
-              <a:spcBef>
-                <a:spcPts val="0"/>
-              </a:spcBef>
-              <a:spcAft>
-                <a:spcPts val="0"/>
-              </a:spcAft>
-              <a:buNone/>
-            </a:pPr>
-            <a:endParaRPr/>
-          </a:p>
-        </p:txBody>
-      </p:sp>
-    </p:spTree>
-  </p:cSld>
-  <p:clrMapOvr>
-    <a:masterClrMapping/>
-  </p:clrMapOvr>
-</p:notes>
-</file>
-
 <file path=ppt/slideLayouts/slideLayout1.xml><?xml version="1.0" encoding="utf-8"?>
 <p:sldLayout xmlns:a="http://schemas.openxmlformats.org/drawingml/2006/main" xmlns:r="http://schemas.openxmlformats.org/officeDocument/2006/relationships" xmlns:p="http://schemas.openxmlformats.org/presentationml/2006/main" matchingName="Title slide" type="title">
   <p:cSld name="TITLE">
@@ -1517,1240 +1196,7 @@
 </p:sldLayout>
 </file>
 
-<file path=ppt/slideLayouts/slideLayout10.xml><?xml version="1.0" encoding="utf-8"?>
-<p:sldLayout xmlns:a="http://schemas.openxmlformats.org/drawingml/2006/main" xmlns:r="http://schemas.openxmlformats.org/officeDocument/2006/relationships" xmlns:p="http://schemas.openxmlformats.org/presentationml/2006/main" matchingName="Big number">
-  <p:cSld name="BIG_NUMBER">
-    <p:spTree>
-      <p:nvGrpSpPr>
-        <p:cNvPr id="1" name="Shape 44"/>
-        <p:cNvGrpSpPr/>
-        <p:nvPr/>
-      </p:nvGrpSpPr>
-      <p:grpSpPr>
-        <a:xfrm>
-          <a:off x="0" y="0"/>
-          <a:ext cx="0" cy="0"/>
-          <a:chOff x="0" y="0"/>
-          <a:chExt cx="0" cy="0"/>
-        </a:xfrm>
-      </p:grpSpPr>
-      <p:sp>
-        <p:nvSpPr>
-          <p:cNvPr id="45" name="Google Shape;45;p11"/>
-          <p:cNvSpPr txBox="1">
-            <a:spLocks noGrp="1"/>
-          </p:cNvSpPr>
-          <p:nvPr>
-            <p:ph type="title" hasCustomPrompt="1"/>
-          </p:nvPr>
-        </p:nvSpPr>
-        <p:spPr>
-          <a:xfrm>
-            <a:off x="311700" y="1106125"/>
-            <a:ext cx="8520600" cy="1963500"/>
-          </a:xfrm>
-          <a:prstGeom prst="rect">
-            <a:avLst/>
-          </a:prstGeom>
-        </p:spPr>
-        <p:txBody>
-          <a:bodyPr spcFirstLastPara="1" wrap="square" lIns="91425" tIns="91425" rIns="91425" bIns="91425" anchor="b" anchorCtr="0">
-            <a:normAutofit/>
-          </a:bodyPr>
-          <a:lstStyle>
-            <a:lvl1pPr lvl="0" algn="ctr">
-              <a:spcBef>
-                <a:spcPts val="0"/>
-              </a:spcBef>
-              <a:spcAft>
-                <a:spcPts val="0"/>
-              </a:spcAft>
-              <a:buSzPts val="12000"/>
-              <a:buNone/>
-              <a:defRPr sz="12000"/>
-            </a:lvl1pPr>
-            <a:lvl2pPr lvl="1" algn="ctr">
-              <a:spcBef>
-                <a:spcPts val="0"/>
-              </a:spcBef>
-              <a:spcAft>
-                <a:spcPts val="0"/>
-              </a:spcAft>
-              <a:buSzPts val="12000"/>
-              <a:buNone/>
-              <a:defRPr sz="12000"/>
-            </a:lvl2pPr>
-            <a:lvl3pPr lvl="2" algn="ctr">
-              <a:spcBef>
-                <a:spcPts val="0"/>
-              </a:spcBef>
-              <a:spcAft>
-                <a:spcPts val="0"/>
-              </a:spcAft>
-              <a:buSzPts val="12000"/>
-              <a:buNone/>
-              <a:defRPr sz="12000"/>
-            </a:lvl3pPr>
-            <a:lvl4pPr lvl="3" algn="ctr">
-              <a:spcBef>
-                <a:spcPts val="0"/>
-              </a:spcBef>
-              <a:spcAft>
-                <a:spcPts val="0"/>
-              </a:spcAft>
-              <a:buSzPts val="12000"/>
-              <a:buNone/>
-              <a:defRPr sz="12000"/>
-            </a:lvl4pPr>
-            <a:lvl5pPr lvl="4" algn="ctr">
-              <a:spcBef>
-                <a:spcPts val="0"/>
-              </a:spcBef>
-              <a:spcAft>
-                <a:spcPts val="0"/>
-              </a:spcAft>
-              <a:buSzPts val="12000"/>
-              <a:buNone/>
-              <a:defRPr sz="12000"/>
-            </a:lvl5pPr>
-            <a:lvl6pPr lvl="5" algn="ctr">
-              <a:spcBef>
-                <a:spcPts val="0"/>
-              </a:spcBef>
-              <a:spcAft>
-                <a:spcPts val="0"/>
-              </a:spcAft>
-              <a:buSzPts val="12000"/>
-              <a:buNone/>
-              <a:defRPr sz="12000"/>
-            </a:lvl6pPr>
-            <a:lvl7pPr lvl="6" algn="ctr">
-              <a:spcBef>
-                <a:spcPts val="0"/>
-              </a:spcBef>
-              <a:spcAft>
-                <a:spcPts val="0"/>
-              </a:spcAft>
-              <a:buSzPts val="12000"/>
-              <a:buNone/>
-              <a:defRPr sz="12000"/>
-            </a:lvl7pPr>
-            <a:lvl8pPr lvl="7" algn="ctr">
-              <a:spcBef>
-                <a:spcPts val="0"/>
-              </a:spcBef>
-              <a:spcAft>
-                <a:spcPts val="0"/>
-              </a:spcAft>
-              <a:buSzPts val="12000"/>
-              <a:buNone/>
-              <a:defRPr sz="12000"/>
-            </a:lvl8pPr>
-            <a:lvl9pPr lvl="8" algn="ctr">
-              <a:spcBef>
-                <a:spcPts val="0"/>
-              </a:spcBef>
-              <a:spcAft>
-                <a:spcPts val="0"/>
-              </a:spcAft>
-              <a:buSzPts val="12000"/>
-              <a:buNone/>
-              <a:defRPr sz="12000"/>
-            </a:lvl9pPr>
-          </a:lstStyle>
-          <a:p>
-            <a:r>
-              <a:t>xx%</a:t>
-            </a:r>
-          </a:p>
-        </p:txBody>
-      </p:sp>
-      <p:sp>
-        <p:nvSpPr>
-          <p:cNvPr id="46" name="Google Shape;46;p11"/>
-          <p:cNvSpPr txBox="1">
-            <a:spLocks noGrp="1"/>
-          </p:cNvSpPr>
-          <p:nvPr>
-            <p:ph type="body" idx="1"/>
-          </p:nvPr>
-        </p:nvSpPr>
-        <p:spPr>
-          <a:xfrm>
-            <a:off x="311700" y="3152225"/>
-            <a:ext cx="8520600" cy="1300800"/>
-          </a:xfrm>
-          <a:prstGeom prst="rect">
-            <a:avLst/>
-          </a:prstGeom>
-        </p:spPr>
-        <p:txBody>
-          <a:bodyPr spcFirstLastPara="1" wrap="square" lIns="91425" tIns="91425" rIns="91425" bIns="91425" anchor="t" anchorCtr="0">
-            <a:normAutofit/>
-          </a:bodyPr>
-          <a:lstStyle>
-            <a:lvl1pPr marL="457200" lvl="0" indent="-342900" algn="ctr">
-              <a:spcBef>
-                <a:spcPts val="0"/>
-              </a:spcBef>
-              <a:spcAft>
-                <a:spcPts val="0"/>
-              </a:spcAft>
-              <a:buSzPts val="1800"/>
-              <a:buChar char="●"/>
-              <a:defRPr/>
-            </a:lvl1pPr>
-            <a:lvl2pPr marL="914400" lvl="1" indent="-317500" algn="ctr">
-              <a:spcBef>
-                <a:spcPts val="0"/>
-              </a:spcBef>
-              <a:spcAft>
-                <a:spcPts val="0"/>
-              </a:spcAft>
-              <a:buSzPts val="1400"/>
-              <a:buChar char="○"/>
-              <a:defRPr/>
-            </a:lvl2pPr>
-            <a:lvl3pPr marL="1371600" lvl="2" indent="-317500" algn="ctr">
-              <a:spcBef>
-                <a:spcPts val="0"/>
-              </a:spcBef>
-              <a:spcAft>
-                <a:spcPts val="0"/>
-              </a:spcAft>
-              <a:buSzPts val="1400"/>
-              <a:buChar char="■"/>
-              <a:defRPr/>
-            </a:lvl3pPr>
-            <a:lvl4pPr marL="1828800" lvl="3" indent="-317500" algn="ctr">
-              <a:spcBef>
-                <a:spcPts val="0"/>
-              </a:spcBef>
-              <a:spcAft>
-                <a:spcPts val="0"/>
-              </a:spcAft>
-              <a:buSzPts val="1400"/>
-              <a:buChar char="●"/>
-              <a:defRPr/>
-            </a:lvl4pPr>
-            <a:lvl5pPr marL="2286000" lvl="4" indent="-317500" algn="ctr">
-              <a:spcBef>
-                <a:spcPts val="0"/>
-              </a:spcBef>
-              <a:spcAft>
-                <a:spcPts val="0"/>
-              </a:spcAft>
-              <a:buSzPts val="1400"/>
-              <a:buChar char="○"/>
-              <a:defRPr/>
-            </a:lvl5pPr>
-            <a:lvl6pPr marL="2743200" lvl="5" indent="-317500" algn="ctr">
-              <a:spcBef>
-                <a:spcPts val="0"/>
-              </a:spcBef>
-              <a:spcAft>
-                <a:spcPts val="0"/>
-              </a:spcAft>
-              <a:buSzPts val="1400"/>
-              <a:buChar char="■"/>
-              <a:defRPr/>
-            </a:lvl6pPr>
-            <a:lvl7pPr marL="3200400" lvl="6" indent="-317500" algn="ctr">
-              <a:spcBef>
-                <a:spcPts val="0"/>
-              </a:spcBef>
-              <a:spcAft>
-                <a:spcPts val="0"/>
-              </a:spcAft>
-              <a:buSzPts val="1400"/>
-              <a:buChar char="●"/>
-              <a:defRPr/>
-            </a:lvl7pPr>
-            <a:lvl8pPr marL="3657600" lvl="7" indent="-317500" algn="ctr">
-              <a:spcBef>
-                <a:spcPts val="0"/>
-              </a:spcBef>
-              <a:spcAft>
-                <a:spcPts val="0"/>
-              </a:spcAft>
-              <a:buSzPts val="1400"/>
-              <a:buChar char="○"/>
-              <a:defRPr/>
-            </a:lvl8pPr>
-            <a:lvl9pPr marL="4114800" lvl="8" indent="-317500" algn="ctr">
-              <a:spcBef>
-                <a:spcPts val="0"/>
-              </a:spcBef>
-              <a:spcAft>
-                <a:spcPts val="0"/>
-              </a:spcAft>
-              <a:buSzPts val="1400"/>
-              <a:buChar char="■"/>
-              <a:defRPr/>
-            </a:lvl9pPr>
-          </a:lstStyle>
-          <a:p>
-            <a:endParaRPr/>
-          </a:p>
-        </p:txBody>
-      </p:sp>
-      <p:sp>
-        <p:nvSpPr>
-          <p:cNvPr id="47" name="Google Shape;47;p11"/>
-          <p:cNvSpPr txBox="1">
-            <a:spLocks noGrp="1"/>
-          </p:cNvSpPr>
-          <p:nvPr>
-            <p:ph type="sldNum" idx="12"/>
-          </p:nvPr>
-        </p:nvSpPr>
-        <p:spPr>
-          <a:xfrm>
-            <a:off x="8472458" y="4663217"/>
-            <a:ext cx="548700" cy="393600"/>
-          </a:xfrm>
-          <a:prstGeom prst="rect">
-            <a:avLst/>
-          </a:prstGeom>
-        </p:spPr>
-        <p:txBody>
-          <a:bodyPr spcFirstLastPara="1" wrap="square" lIns="91425" tIns="91425" rIns="91425" bIns="91425" anchor="ctr" anchorCtr="0">
-            <a:normAutofit/>
-          </a:bodyPr>
-          <a:lstStyle>
-            <a:lvl1pPr lvl="0">
-              <a:buNone/>
-              <a:defRPr/>
-            </a:lvl1pPr>
-            <a:lvl2pPr lvl="1">
-              <a:buNone/>
-              <a:defRPr/>
-            </a:lvl2pPr>
-            <a:lvl3pPr lvl="2">
-              <a:buNone/>
-              <a:defRPr/>
-            </a:lvl3pPr>
-            <a:lvl4pPr lvl="3">
-              <a:buNone/>
-              <a:defRPr/>
-            </a:lvl4pPr>
-            <a:lvl5pPr lvl="4">
-              <a:buNone/>
-              <a:defRPr/>
-            </a:lvl5pPr>
-            <a:lvl6pPr lvl="5">
-              <a:buNone/>
-              <a:defRPr/>
-            </a:lvl6pPr>
-            <a:lvl7pPr lvl="6">
-              <a:buNone/>
-              <a:defRPr/>
-            </a:lvl7pPr>
-            <a:lvl8pPr lvl="7">
-              <a:buNone/>
-              <a:defRPr/>
-            </a:lvl8pPr>
-            <a:lvl9pPr lvl="8">
-              <a:buNone/>
-              <a:defRPr/>
-            </a:lvl9pPr>
-          </a:lstStyle>
-          <a:p>
-            <a:pPr marL="0" lvl="0" indent="0" algn="r" rtl="0">
-              <a:spcBef>
-                <a:spcPts val="0"/>
-              </a:spcBef>
-              <a:spcAft>
-                <a:spcPts val="0"/>
-              </a:spcAft>
-              <a:buNone/>
-            </a:pPr>
-            <a:fld id="{00000000-1234-1234-1234-123412341234}" type="slidenum">
-              <a:rPr lang="en"/>
-              <a:t>‹#›</a:t>
-            </a:fld>
-            <a:endParaRPr/>
-          </a:p>
-        </p:txBody>
-      </p:sp>
-    </p:spTree>
-  </p:cSld>
-  <p:clrMapOvr>
-    <a:masterClrMapping/>
-  </p:clrMapOvr>
-</p:sldLayout>
-</file>
-
-<file path=ppt/slideLayouts/slideLayout11.xml><?xml version="1.0" encoding="utf-8"?>
-<p:sldLayout xmlns:a="http://schemas.openxmlformats.org/drawingml/2006/main" xmlns:r="http://schemas.openxmlformats.org/officeDocument/2006/relationships" xmlns:p="http://schemas.openxmlformats.org/presentationml/2006/main" matchingName="Blank" type="blank">
-  <p:cSld name="BLANK">
-    <p:spTree>
-      <p:nvGrpSpPr>
-        <p:cNvPr id="1" name="Shape 48"/>
-        <p:cNvGrpSpPr/>
-        <p:nvPr/>
-      </p:nvGrpSpPr>
-      <p:grpSpPr>
-        <a:xfrm>
-          <a:off x="0" y="0"/>
-          <a:ext cx="0" cy="0"/>
-          <a:chOff x="0" y="0"/>
-          <a:chExt cx="0" cy="0"/>
-        </a:xfrm>
-      </p:grpSpPr>
-      <p:sp>
-        <p:nvSpPr>
-          <p:cNvPr id="49" name="Google Shape;49;p12"/>
-          <p:cNvSpPr txBox="1">
-            <a:spLocks noGrp="1"/>
-          </p:cNvSpPr>
-          <p:nvPr>
-            <p:ph type="sldNum" idx="12"/>
-          </p:nvPr>
-        </p:nvSpPr>
-        <p:spPr>
-          <a:xfrm>
-            <a:off x="8472458" y="4663217"/>
-            <a:ext cx="548700" cy="393600"/>
-          </a:xfrm>
-          <a:prstGeom prst="rect">
-            <a:avLst/>
-          </a:prstGeom>
-        </p:spPr>
-        <p:txBody>
-          <a:bodyPr spcFirstLastPara="1" wrap="square" lIns="91425" tIns="91425" rIns="91425" bIns="91425" anchor="ctr" anchorCtr="0">
-            <a:normAutofit/>
-          </a:bodyPr>
-          <a:lstStyle>
-            <a:lvl1pPr lvl="0">
-              <a:buNone/>
-              <a:defRPr/>
-            </a:lvl1pPr>
-            <a:lvl2pPr lvl="1">
-              <a:buNone/>
-              <a:defRPr/>
-            </a:lvl2pPr>
-            <a:lvl3pPr lvl="2">
-              <a:buNone/>
-              <a:defRPr/>
-            </a:lvl3pPr>
-            <a:lvl4pPr lvl="3">
-              <a:buNone/>
-              <a:defRPr/>
-            </a:lvl4pPr>
-            <a:lvl5pPr lvl="4">
-              <a:buNone/>
-              <a:defRPr/>
-            </a:lvl5pPr>
-            <a:lvl6pPr lvl="5">
-              <a:buNone/>
-              <a:defRPr/>
-            </a:lvl6pPr>
-            <a:lvl7pPr lvl="6">
-              <a:buNone/>
-              <a:defRPr/>
-            </a:lvl7pPr>
-            <a:lvl8pPr lvl="7">
-              <a:buNone/>
-              <a:defRPr/>
-            </a:lvl8pPr>
-            <a:lvl9pPr lvl="8">
-              <a:buNone/>
-              <a:defRPr/>
-            </a:lvl9pPr>
-          </a:lstStyle>
-          <a:p>
-            <a:pPr marL="0" lvl="0" indent="0" algn="r" rtl="0">
-              <a:spcBef>
-                <a:spcPts val="0"/>
-              </a:spcBef>
-              <a:spcAft>
-                <a:spcPts val="0"/>
-              </a:spcAft>
-              <a:buNone/>
-            </a:pPr>
-            <a:fld id="{00000000-1234-1234-1234-123412341234}" type="slidenum">
-              <a:rPr lang="en"/>
-              <a:t>‹#›</a:t>
-            </a:fld>
-            <a:endParaRPr/>
-          </a:p>
-        </p:txBody>
-      </p:sp>
-    </p:spTree>
-  </p:cSld>
-  <p:clrMapOvr>
-    <a:masterClrMapping/>
-  </p:clrMapOvr>
-</p:sldLayout>
-</file>
-
-<file path=ppt/slideLayouts/slideLayout12.xml><?xml version="1.0" encoding="utf-8"?>
-<p:sldLayout xmlns:a="http://schemas.openxmlformats.org/drawingml/2006/main" xmlns:r="http://schemas.openxmlformats.org/officeDocument/2006/relationships" xmlns:p="http://schemas.openxmlformats.org/presentationml/2006/main" type="obj">
-  <p:cSld name="Title and Content">
-    <p:spTree>
-      <p:nvGrpSpPr>
-        <p:cNvPr id="1" name=""/>
-        <p:cNvGrpSpPr/>
-        <p:nvPr/>
-      </p:nvGrpSpPr>
-      <p:grpSpPr>
-        <a:xfrm>
-          <a:off x="0" y="0"/>
-          <a:ext cx="0" cy="0"/>
-          <a:chOff x="0" y="0"/>
-          <a:chExt cx="0" cy="0"/>
-        </a:xfrm>
-      </p:grpSpPr>
-      <p:sp>
-        <p:nvSpPr>
-          <p:cNvPr id="2" name="Title 1"/>
-          <p:cNvSpPr>
-            <a:spLocks noGrp="1"/>
-          </p:cNvSpPr>
-          <p:nvPr>
-            <p:ph type="title"/>
-          </p:nvPr>
-        </p:nvSpPr>
-        <p:spPr/>
-        <p:txBody>
-          <a:bodyPr/>
-          <a:lstStyle/>
-          <a:p>
-            <a:r>
-              <a:rPr lang="en-US"/>
-              <a:t>Click to edit Master title style</a:t>
-            </a:r>
-            <a:endParaRPr lang="en-US" dirty="0"/>
-          </a:p>
-        </p:txBody>
-      </p:sp>
-      <p:sp>
-        <p:nvSpPr>
-          <p:cNvPr id="3" name="Content Placeholder 2"/>
-          <p:cNvSpPr>
-            <a:spLocks noGrp="1"/>
-          </p:cNvSpPr>
-          <p:nvPr>
-            <p:ph idx="1"/>
-          </p:nvPr>
-        </p:nvSpPr>
-        <p:spPr/>
-        <p:txBody>
-          <a:bodyPr/>
-          <a:lstStyle/>
-          <a:p>
-            <a:pPr lvl="0"/>
-            <a:r>
-              <a:rPr lang="en-US"/>
-              <a:t>Click to edit Master text styles</a:t>
-            </a:r>
-          </a:p>
-          <a:p>
-            <a:pPr lvl="1"/>
-            <a:r>
-              <a:rPr lang="en-US"/>
-              <a:t>Second level</a:t>
-            </a:r>
-          </a:p>
-          <a:p>
-            <a:pPr lvl="2"/>
-            <a:r>
-              <a:rPr lang="en-US"/>
-              <a:t>Third level</a:t>
-            </a:r>
-          </a:p>
-          <a:p>
-            <a:pPr lvl="3"/>
-            <a:r>
-              <a:rPr lang="en-US"/>
-              <a:t>Fourth level</a:t>
-            </a:r>
-          </a:p>
-          <a:p>
-            <a:pPr lvl="4"/>
-            <a:r>
-              <a:rPr lang="en-US"/>
-              <a:t>Fifth level</a:t>
-            </a:r>
-            <a:endParaRPr lang="en-US" dirty="0"/>
-          </a:p>
-        </p:txBody>
-      </p:sp>
-      <p:sp>
-        <p:nvSpPr>
-          <p:cNvPr id="4" name="Date Placeholder 3"/>
-          <p:cNvSpPr>
-            <a:spLocks noGrp="1"/>
-          </p:cNvSpPr>
-          <p:nvPr>
-            <p:ph type="dt" sz="half" idx="10"/>
-          </p:nvPr>
-        </p:nvSpPr>
-        <p:spPr/>
-        <p:txBody>
-          <a:bodyPr/>
-          <a:lstStyle/>
-          <a:p>
-            <a:fld id="{B8A06578-B805-49AF-9D64-CAB41C8A9660}" type="datetimeFigureOut">
-              <a:rPr lang="en-IN" smtClean="0"/>
-              <a:t>31-01-2026</a:t>
-            </a:fld>
-            <a:endParaRPr lang="en-IN"/>
-          </a:p>
-        </p:txBody>
-      </p:sp>
-      <p:sp>
-        <p:nvSpPr>
-          <p:cNvPr id="5" name="Footer Placeholder 4"/>
-          <p:cNvSpPr>
-            <a:spLocks noGrp="1"/>
-          </p:cNvSpPr>
-          <p:nvPr>
-            <p:ph type="ftr" sz="quarter" idx="11"/>
-          </p:nvPr>
-        </p:nvSpPr>
-        <p:spPr/>
-        <p:txBody>
-          <a:bodyPr/>
-          <a:lstStyle/>
-          <a:p>
-            <a:endParaRPr lang="en-IN"/>
-          </a:p>
-        </p:txBody>
-      </p:sp>
-      <p:sp>
-        <p:nvSpPr>
-          <p:cNvPr id="6" name="Slide Number Placeholder 5"/>
-          <p:cNvSpPr>
-            <a:spLocks noGrp="1"/>
-          </p:cNvSpPr>
-          <p:nvPr>
-            <p:ph type="sldNum" sz="quarter" idx="12"/>
-          </p:nvPr>
-        </p:nvSpPr>
-        <p:spPr/>
-        <p:txBody>
-          <a:bodyPr/>
-          <a:lstStyle/>
-          <a:p>
-            <a:fld id="{DAF7ADC7-1FC6-41A6-8F15-2D18E95A8651}" type="slidenum">
-              <a:rPr lang="en-IN" smtClean="0"/>
-              <a:t>‹#›</a:t>
-            </a:fld>
-            <a:endParaRPr lang="en-IN"/>
-          </a:p>
-        </p:txBody>
-      </p:sp>
-    </p:spTree>
-    <p:extLst>
-      <p:ext uri="{BB962C8B-B14F-4D97-AF65-F5344CB8AC3E}">
-        <p14:creationId xmlns:p14="http://schemas.microsoft.com/office/powerpoint/2010/main" val="3641137622"/>
-      </p:ext>
-    </p:extLst>
-  </p:cSld>
-  <p:clrMapOvr>
-    <a:masterClrMapping/>
-  </p:clrMapOvr>
-</p:sldLayout>
-</file>
-
 <file path=ppt/slideLayouts/slideLayout2.xml><?xml version="1.0" encoding="utf-8"?>
-<p:sldLayout xmlns:a="http://schemas.openxmlformats.org/drawingml/2006/main" xmlns:r="http://schemas.openxmlformats.org/officeDocument/2006/relationships" xmlns:p="http://schemas.openxmlformats.org/presentationml/2006/main" matchingName="Section header" type="secHead">
-  <p:cSld name="SECTION_HEADER">
-    <p:spTree>
-      <p:nvGrpSpPr>
-        <p:cNvPr id="1" name="Shape 13"/>
-        <p:cNvGrpSpPr/>
-        <p:nvPr/>
-      </p:nvGrpSpPr>
-      <p:grpSpPr>
-        <a:xfrm>
-          <a:off x="0" y="0"/>
-          <a:ext cx="0" cy="0"/>
-          <a:chOff x="0" y="0"/>
-          <a:chExt cx="0" cy="0"/>
-        </a:xfrm>
-      </p:grpSpPr>
-      <p:sp>
-        <p:nvSpPr>
-          <p:cNvPr id="14" name="Google Shape;14;p3"/>
-          <p:cNvSpPr txBox="1">
-            <a:spLocks noGrp="1"/>
-          </p:cNvSpPr>
-          <p:nvPr>
-            <p:ph type="title"/>
-          </p:nvPr>
-        </p:nvSpPr>
-        <p:spPr>
-          <a:xfrm>
-            <a:off x="311700" y="2150850"/>
-            <a:ext cx="8520600" cy="841800"/>
-          </a:xfrm>
-          <a:prstGeom prst="rect">
-            <a:avLst/>
-          </a:prstGeom>
-        </p:spPr>
-        <p:txBody>
-          <a:bodyPr spcFirstLastPara="1" wrap="square" lIns="91425" tIns="91425" rIns="91425" bIns="91425" anchor="ctr" anchorCtr="0">
-            <a:normAutofit/>
-          </a:bodyPr>
-          <a:lstStyle>
-            <a:lvl1pPr lvl="0" algn="ctr">
-              <a:spcBef>
-                <a:spcPts val="0"/>
-              </a:spcBef>
-              <a:spcAft>
-                <a:spcPts val="0"/>
-              </a:spcAft>
-              <a:buSzPts val="3600"/>
-              <a:buNone/>
-              <a:defRPr sz="3600"/>
-            </a:lvl1pPr>
-            <a:lvl2pPr lvl="1" algn="ctr">
-              <a:spcBef>
-                <a:spcPts val="0"/>
-              </a:spcBef>
-              <a:spcAft>
-                <a:spcPts val="0"/>
-              </a:spcAft>
-              <a:buSzPts val="3600"/>
-              <a:buNone/>
-              <a:defRPr sz="3600"/>
-            </a:lvl2pPr>
-            <a:lvl3pPr lvl="2" algn="ctr">
-              <a:spcBef>
-                <a:spcPts val="0"/>
-              </a:spcBef>
-              <a:spcAft>
-                <a:spcPts val="0"/>
-              </a:spcAft>
-              <a:buSzPts val="3600"/>
-              <a:buNone/>
-              <a:defRPr sz="3600"/>
-            </a:lvl3pPr>
-            <a:lvl4pPr lvl="3" algn="ctr">
-              <a:spcBef>
-                <a:spcPts val="0"/>
-              </a:spcBef>
-              <a:spcAft>
-                <a:spcPts val="0"/>
-              </a:spcAft>
-              <a:buSzPts val="3600"/>
-              <a:buNone/>
-              <a:defRPr sz="3600"/>
-            </a:lvl4pPr>
-            <a:lvl5pPr lvl="4" algn="ctr">
-              <a:spcBef>
-                <a:spcPts val="0"/>
-              </a:spcBef>
-              <a:spcAft>
-                <a:spcPts val="0"/>
-              </a:spcAft>
-              <a:buSzPts val="3600"/>
-              <a:buNone/>
-              <a:defRPr sz="3600"/>
-            </a:lvl5pPr>
-            <a:lvl6pPr lvl="5" algn="ctr">
-              <a:spcBef>
-                <a:spcPts val="0"/>
-              </a:spcBef>
-              <a:spcAft>
-                <a:spcPts val="0"/>
-              </a:spcAft>
-              <a:buSzPts val="3600"/>
-              <a:buNone/>
-              <a:defRPr sz="3600"/>
-            </a:lvl6pPr>
-            <a:lvl7pPr lvl="6" algn="ctr">
-              <a:spcBef>
-                <a:spcPts val="0"/>
-              </a:spcBef>
-              <a:spcAft>
-                <a:spcPts val="0"/>
-              </a:spcAft>
-              <a:buSzPts val="3600"/>
-              <a:buNone/>
-              <a:defRPr sz="3600"/>
-            </a:lvl7pPr>
-            <a:lvl8pPr lvl="7" algn="ctr">
-              <a:spcBef>
-                <a:spcPts val="0"/>
-              </a:spcBef>
-              <a:spcAft>
-                <a:spcPts val="0"/>
-              </a:spcAft>
-              <a:buSzPts val="3600"/>
-              <a:buNone/>
-              <a:defRPr sz="3600"/>
-            </a:lvl8pPr>
-            <a:lvl9pPr lvl="8" algn="ctr">
-              <a:spcBef>
-                <a:spcPts val="0"/>
-              </a:spcBef>
-              <a:spcAft>
-                <a:spcPts val="0"/>
-              </a:spcAft>
-              <a:buSzPts val="3600"/>
-              <a:buNone/>
-              <a:defRPr sz="3600"/>
-            </a:lvl9pPr>
-          </a:lstStyle>
-          <a:p>
-            <a:endParaRPr/>
-          </a:p>
-        </p:txBody>
-      </p:sp>
-      <p:sp>
-        <p:nvSpPr>
-          <p:cNvPr id="15" name="Google Shape;15;p3"/>
-          <p:cNvSpPr txBox="1">
-            <a:spLocks noGrp="1"/>
-          </p:cNvSpPr>
-          <p:nvPr>
-            <p:ph type="sldNum" idx="12"/>
-          </p:nvPr>
-        </p:nvSpPr>
-        <p:spPr>
-          <a:xfrm>
-            <a:off x="8472458" y="4663217"/>
-            <a:ext cx="548700" cy="393600"/>
-          </a:xfrm>
-          <a:prstGeom prst="rect">
-            <a:avLst/>
-          </a:prstGeom>
-        </p:spPr>
-        <p:txBody>
-          <a:bodyPr spcFirstLastPara="1" wrap="square" lIns="91425" tIns="91425" rIns="91425" bIns="91425" anchor="ctr" anchorCtr="0">
-            <a:normAutofit/>
-          </a:bodyPr>
-          <a:lstStyle>
-            <a:lvl1pPr lvl="0">
-              <a:buNone/>
-              <a:defRPr/>
-            </a:lvl1pPr>
-            <a:lvl2pPr lvl="1">
-              <a:buNone/>
-              <a:defRPr/>
-            </a:lvl2pPr>
-            <a:lvl3pPr lvl="2">
-              <a:buNone/>
-              <a:defRPr/>
-            </a:lvl3pPr>
-            <a:lvl4pPr lvl="3">
-              <a:buNone/>
-              <a:defRPr/>
-            </a:lvl4pPr>
-            <a:lvl5pPr lvl="4">
-              <a:buNone/>
-              <a:defRPr/>
-            </a:lvl5pPr>
-            <a:lvl6pPr lvl="5">
-              <a:buNone/>
-              <a:defRPr/>
-            </a:lvl6pPr>
-            <a:lvl7pPr lvl="6">
-              <a:buNone/>
-              <a:defRPr/>
-            </a:lvl7pPr>
-            <a:lvl8pPr lvl="7">
-              <a:buNone/>
-              <a:defRPr/>
-            </a:lvl8pPr>
-            <a:lvl9pPr lvl="8">
-              <a:buNone/>
-              <a:defRPr/>
-            </a:lvl9pPr>
-          </a:lstStyle>
-          <a:p>
-            <a:pPr marL="0" lvl="0" indent="0" algn="r" rtl="0">
-              <a:spcBef>
-                <a:spcPts val="0"/>
-              </a:spcBef>
-              <a:spcAft>
-                <a:spcPts val="0"/>
-              </a:spcAft>
-              <a:buNone/>
-            </a:pPr>
-            <a:fld id="{00000000-1234-1234-1234-123412341234}" type="slidenum">
-              <a:rPr lang="en"/>
-              <a:t>‹#›</a:t>
-            </a:fld>
-            <a:endParaRPr/>
-          </a:p>
-        </p:txBody>
-      </p:sp>
-    </p:spTree>
-  </p:cSld>
-  <p:clrMapOvr>
-    <a:masterClrMapping/>
-  </p:clrMapOvr>
-</p:sldLayout>
-</file>
-
-<file path=ppt/slideLayouts/slideLayout3.xml><?xml version="1.0" encoding="utf-8"?>
-<p:sldLayout xmlns:a="http://schemas.openxmlformats.org/drawingml/2006/main" xmlns:r="http://schemas.openxmlformats.org/officeDocument/2006/relationships" xmlns:p="http://schemas.openxmlformats.org/presentationml/2006/main" matchingName="Title and body" type="tx">
-  <p:cSld name="TITLE_AND_BODY">
-    <p:spTree>
-      <p:nvGrpSpPr>
-        <p:cNvPr id="1" name="Shape 16"/>
-        <p:cNvGrpSpPr/>
-        <p:nvPr/>
-      </p:nvGrpSpPr>
-      <p:grpSpPr>
-        <a:xfrm>
-          <a:off x="0" y="0"/>
-          <a:ext cx="0" cy="0"/>
-          <a:chOff x="0" y="0"/>
-          <a:chExt cx="0" cy="0"/>
-        </a:xfrm>
-      </p:grpSpPr>
-      <p:sp>
-        <p:nvSpPr>
-          <p:cNvPr id="17" name="Google Shape;17;p4"/>
-          <p:cNvSpPr txBox="1">
-            <a:spLocks noGrp="1"/>
-          </p:cNvSpPr>
-          <p:nvPr>
-            <p:ph type="title"/>
-          </p:nvPr>
-        </p:nvSpPr>
-        <p:spPr>
-          <a:xfrm>
-            <a:off x="311700" y="445025"/>
-            <a:ext cx="8520600" cy="572700"/>
-          </a:xfrm>
-          <a:prstGeom prst="rect">
-            <a:avLst/>
-          </a:prstGeom>
-        </p:spPr>
-        <p:txBody>
-          <a:bodyPr spcFirstLastPara="1" wrap="square" lIns="91425" tIns="91425" rIns="91425" bIns="91425" anchor="t" anchorCtr="0">
-            <a:normAutofit/>
-          </a:bodyPr>
-          <a:lstStyle>
-            <a:lvl1pPr lvl="0">
-              <a:spcBef>
-                <a:spcPts val="0"/>
-              </a:spcBef>
-              <a:spcAft>
-                <a:spcPts val="0"/>
-              </a:spcAft>
-              <a:buSzPts val="2800"/>
-              <a:buNone/>
-              <a:defRPr/>
-            </a:lvl1pPr>
-            <a:lvl2pPr lvl="1">
-              <a:spcBef>
-                <a:spcPts val="0"/>
-              </a:spcBef>
-              <a:spcAft>
-                <a:spcPts val="0"/>
-              </a:spcAft>
-              <a:buSzPts val="2800"/>
-              <a:buNone/>
-              <a:defRPr/>
-            </a:lvl2pPr>
-            <a:lvl3pPr lvl="2">
-              <a:spcBef>
-                <a:spcPts val="0"/>
-              </a:spcBef>
-              <a:spcAft>
-                <a:spcPts val="0"/>
-              </a:spcAft>
-              <a:buSzPts val="2800"/>
-              <a:buNone/>
-              <a:defRPr/>
-            </a:lvl3pPr>
-            <a:lvl4pPr lvl="3">
-              <a:spcBef>
-                <a:spcPts val="0"/>
-              </a:spcBef>
-              <a:spcAft>
-                <a:spcPts val="0"/>
-              </a:spcAft>
-              <a:buSzPts val="2800"/>
-              <a:buNone/>
-              <a:defRPr/>
-            </a:lvl4pPr>
-            <a:lvl5pPr lvl="4">
-              <a:spcBef>
-                <a:spcPts val="0"/>
-              </a:spcBef>
-              <a:spcAft>
-                <a:spcPts val="0"/>
-              </a:spcAft>
-              <a:buSzPts val="2800"/>
-              <a:buNone/>
-              <a:defRPr/>
-            </a:lvl5pPr>
-            <a:lvl6pPr lvl="5">
-              <a:spcBef>
-                <a:spcPts val="0"/>
-              </a:spcBef>
-              <a:spcAft>
-                <a:spcPts val="0"/>
-              </a:spcAft>
-              <a:buSzPts val="2800"/>
-              <a:buNone/>
-              <a:defRPr/>
-            </a:lvl6pPr>
-            <a:lvl7pPr lvl="6">
-              <a:spcBef>
-                <a:spcPts val="0"/>
-              </a:spcBef>
-              <a:spcAft>
-                <a:spcPts val="0"/>
-              </a:spcAft>
-              <a:buSzPts val="2800"/>
-              <a:buNone/>
-              <a:defRPr/>
-            </a:lvl7pPr>
-            <a:lvl8pPr lvl="7">
-              <a:spcBef>
-                <a:spcPts val="0"/>
-              </a:spcBef>
-              <a:spcAft>
-                <a:spcPts val="0"/>
-              </a:spcAft>
-              <a:buSzPts val="2800"/>
-              <a:buNone/>
-              <a:defRPr/>
-            </a:lvl8pPr>
-            <a:lvl9pPr lvl="8">
-              <a:spcBef>
-                <a:spcPts val="0"/>
-              </a:spcBef>
-              <a:spcAft>
-                <a:spcPts val="0"/>
-              </a:spcAft>
-              <a:buSzPts val="2800"/>
-              <a:buNone/>
-              <a:defRPr/>
-            </a:lvl9pPr>
-          </a:lstStyle>
-          <a:p>
-            <a:endParaRPr/>
-          </a:p>
-        </p:txBody>
-      </p:sp>
-      <p:sp>
-        <p:nvSpPr>
-          <p:cNvPr id="18" name="Google Shape;18;p4"/>
-          <p:cNvSpPr txBox="1">
-            <a:spLocks noGrp="1"/>
-          </p:cNvSpPr>
-          <p:nvPr>
-            <p:ph type="body" idx="1"/>
-          </p:nvPr>
-        </p:nvSpPr>
-        <p:spPr>
-          <a:xfrm>
-            <a:off x="311700" y="1152475"/>
-            <a:ext cx="8520600" cy="3416400"/>
-          </a:xfrm>
-          <a:prstGeom prst="rect">
-            <a:avLst/>
-          </a:prstGeom>
-        </p:spPr>
-        <p:txBody>
-          <a:bodyPr spcFirstLastPara="1" wrap="square" lIns="91425" tIns="91425" rIns="91425" bIns="91425" anchor="t" anchorCtr="0">
-            <a:normAutofit/>
-          </a:bodyPr>
-          <a:lstStyle>
-            <a:lvl1pPr marL="457200" lvl="0" indent="-342900">
-              <a:spcBef>
-                <a:spcPts val="0"/>
-              </a:spcBef>
-              <a:spcAft>
-                <a:spcPts val="0"/>
-              </a:spcAft>
-              <a:buSzPts val="1800"/>
-              <a:buChar char="●"/>
-              <a:defRPr/>
-            </a:lvl1pPr>
-            <a:lvl2pPr marL="914400" lvl="1" indent="-317500">
-              <a:spcBef>
-                <a:spcPts val="0"/>
-              </a:spcBef>
-              <a:spcAft>
-                <a:spcPts val="0"/>
-              </a:spcAft>
-              <a:buSzPts val="1400"/>
-              <a:buChar char="○"/>
-              <a:defRPr/>
-            </a:lvl2pPr>
-            <a:lvl3pPr marL="1371600" lvl="2" indent="-317500">
-              <a:spcBef>
-                <a:spcPts val="0"/>
-              </a:spcBef>
-              <a:spcAft>
-                <a:spcPts val="0"/>
-              </a:spcAft>
-              <a:buSzPts val="1400"/>
-              <a:buChar char="■"/>
-              <a:defRPr/>
-            </a:lvl3pPr>
-            <a:lvl4pPr marL="1828800" lvl="3" indent="-317500">
-              <a:spcBef>
-                <a:spcPts val="0"/>
-              </a:spcBef>
-              <a:spcAft>
-                <a:spcPts val="0"/>
-              </a:spcAft>
-              <a:buSzPts val="1400"/>
-              <a:buChar char="●"/>
-              <a:defRPr/>
-            </a:lvl4pPr>
-            <a:lvl5pPr marL="2286000" lvl="4" indent="-317500">
-              <a:spcBef>
-                <a:spcPts val="0"/>
-              </a:spcBef>
-              <a:spcAft>
-                <a:spcPts val="0"/>
-              </a:spcAft>
-              <a:buSzPts val="1400"/>
-              <a:buChar char="○"/>
-              <a:defRPr/>
-            </a:lvl5pPr>
-            <a:lvl6pPr marL="2743200" lvl="5" indent="-317500">
-              <a:spcBef>
-                <a:spcPts val="0"/>
-              </a:spcBef>
-              <a:spcAft>
-                <a:spcPts val="0"/>
-              </a:spcAft>
-              <a:buSzPts val="1400"/>
-              <a:buChar char="■"/>
-              <a:defRPr/>
-            </a:lvl6pPr>
-            <a:lvl7pPr marL="3200400" lvl="6" indent="-317500">
-              <a:spcBef>
-                <a:spcPts val="0"/>
-              </a:spcBef>
-              <a:spcAft>
-                <a:spcPts val="0"/>
-              </a:spcAft>
-              <a:buSzPts val="1400"/>
-              <a:buChar char="●"/>
-              <a:defRPr/>
-            </a:lvl7pPr>
-            <a:lvl8pPr marL="3657600" lvl="7" indent="-317500">
-              <a:spcBef>
-                <a:spcPts val="0"/>
-              </a:spcBef>
-              <a:spcAft>
-                <a:spcPts val="0"/>
-              </a:spcAft>
-              <a:buSzPts val="1400"/>
-              <a:buChar char="○"/>
-              <a:defRPr/>
-            </a:lvl8pPr>
-            <a:lvl9pPr marL="4114800" lvl="8" indent="-317500">
-              <a:spcBef>
-                <a:spcPts val="0"/>
-              </a:spcBef>
-              <a:spcAft>
-                <a:spcPts val="0"/>
-              </a:spcAft>
-              <a:buSzPts val="1400"/>
-              <a:buChar char="■"/>
-              <a:defRPr/>
-            </a:lvl9pPr>
-          </a:lstStyle>
-          <a:p>
-            <a:endParaRPr/>
-          </a:p>
-        </p:txBody>
-      </p:sp>
-      <p:sp>
-        <p:nvSpPr>
-          <p:cNvPr id="19" name="Google Shape;19;p4"/>
-          <p:cNvSpPr txBox="1">
-            <a:spLocks noGrp="1"/>
-          </p:cNvSpPr>
-          <p:nvPr>
-            <p:ph type="sldNum" idx="12"/>
-          </p:nvPr>
-        </p:nvSpPr>
-        <p:spPr>
-          <a:xfrm>
-            <a:off x="8472458" y="4663217"/>
-            <a:ext cx="548700" cy="393600"/>
-          </a:xfrm>
-          <a:prstGeom prst="rect">
-            <a:avLst/>
-          </a:prstGeom>
-        </p:spPr>
-        <p:txBody>
-          <a:bodyPr spcFirstLastPara="1" wrap="square" lIns="91425" tIns="91425" rIns="91425" bIns="91425" anchor="ctr" anchorCtr="0">
-            <a:normAutofit/>
-          </a:bodyPr>
-          <a:lstStyle>
-            <a:lvl1pPr lvl="0">
-              <a:buNone/>
-              <a:defRPr/>
-            </a:lvl1pPr>
-            <a:lvl2pPr lvl="1">
-              <a:buNone/>
-              <a:defRPr/>
-            </a:lvl2pPr>
-            <a:lvl3pPr lvl="2">
-              <a:buNone/>
-              <a:defRPr/>
-            </a:lvl3pPr>
-            <a:lvl4pPr lvl="3">
-              <a:buNone/>
-              <a:defRPr/>
-            </a:lvl4pPr>
-            <a:lvl5pPr lvl="4">
-              <a:buNone/>
-              <a:defRPr/>
-            </a:lvl5pPr>
-            <a:lvl6pPr lvl="5">
-              <a:buNone/>
-              <a:defRPr/>
-            </a:lvl6pPr>
-            <a:lvl7pPr lvl="6">
-              <a:buNone/>
-              <a:defRPr/>
-            </a:lvl7pPr>
-            <a:lvl8pPr lvl="7">
-              <a:buNone/>
-              <a:defRPr/>
-            </a:lvl8pPr>
-            <a:lvl9pPr lvl="8">
-              <a:buNone/>
-              <a:defRPr/>
-            </a:lvl9pPr>
-          </a:lstStyle>
-          <a:p>
-            <a:pPr marL="0" lvl="0" indent="0" algn="r" rtl="0">
-              <a:spcBef>
-                <a:spcPts val="0"/>
-              </a:spcBef>
-              <a:spcAft>
-                <a:spcPts val="0"/>
-              </a:spcAft>
-              <a:buNone/>
-            </a:pPr>
-            <a:fld id="{00000000-1234-1234-1234-123412341234}" type="slidenum">
-              <a:rPr lang="en"/>
-              <a:t>‹#›</a:t>
-            </a:fld>
-            <a:endParaRPr/>
-          </a:p>
-        </p:txBody>
-      </p:sp>
-    </p:spTree>
-  </p:cSld>
-  <p:clrMapOvr>
-    <a:masterClrMapping/>
-  </p:clrMapOvr>
-</p:sldLayout>
-</file>
-
-<file path=ppt/slideLayouts/slideLayout4.xml><?xml version="1.0" encoding="utf-8"?>
 <p:sldLayout xmlns:a="http://schemas.openxmlformats.org/drawingml/2006/main" xmlns:r="http://schemas.openxmlformats.org/officeDocument/2006/relationships" xmlns:p="http://schemas.openxmlformats.org/presentationml/2006/main" matchingName="Title and two columns" type="twoColTx">
   <p:cSld name="TITLE_AND_TWO_COLUMNS">
     <p:spTree>
@@ -3241,7 +1687,7 @@
 </p:sldLayout>
 </file>
 
-<file path=ppt/slideLayouts/slideLayout5.xml><?xml version="1.0" encoding="utf-8"?>
+<file path=ppt/slideLayouts/slideLayout3.xml><?xml version="1.0" encoding="utf-8"?>
 <p:sldLayout xmlns:a="http://schemas.openxmlformats.org/drawingml/2006/main" xmlns:r="http://schemas.openxmlformats.org/officeDocument/2006/relationships" xmlns:p="http://schemas.openxmlformats.org/presentationml/2006/main" matchingName="Title only" type="titleOnly">
   <p:cSld name="TITLE_ONLY">
     <p:spTree>
@@ -3474,7 +1920,7 @@
 </p:sldLayout>
 </file>
 
-<file path=ppt/slideLayouts/slideLayout6.xml><?xml version="1.0" encoding="utf-8"?>
+<file path=ppt/slideLayouts/slideLayout4.xml><?xml version="1.0" encoding="utf-8"?>
 <p:sldLayout xmlns:a="http://schemas.openxmlformats.org/drawingml/2006/main" xmlns:r="http://schemas.openxmlformats.org/officeDocument/2006/relationships" xmlns:p="http://schemas.openxmlformats.org/presentationml/2006/main" matchingName="One column text">
   <p:cSld name="ONE_COLUMN_TEXT">
     <p:spTree>
@@ -3836,7 +2282,7 @@
 </p:sldLayout>
 </file>
 
-<file path=ppt/slideLayouts/slideLayout7.xml><?xml version="1.0" encoding="utf-8"?>
+<file path=ppt/slideLayouts/slideLayout5.xml><?xml version="1.0" encoding="utf-8"?>
 <p:sldLayout xmlns:a="http://schemas.openxmlformats.org/drawingml/2006/main" xmlns:r="http://schemas.openxmlformats.org/officeDocument/2006/relationships" xmlns:p="http://schemas.openxmlformats.org/presentationml/2006/main" matchingName="Main point">
   <p:cSld name="MAIN_POINT">
     <p:spTree>
@@ -4069,7 +2515,7 @@
 </p:sldLayout>
 </file>
 
-<file path=ppt/slideLayouts/slideLayout8.xml><?xml version="1.0" encoding="utf-8"?>
+<file path=ppt/slideLayouts/slideLayout6.xml><?xml version="1.0" encoding="utf-8"?>
 <p:sldLayout xmlns:a="http://schemas.openxmlformats.org/drawingml/2006/main" xmlns:r="http://schemas.openxmlformats.org/officeDocument/2006/relationships" xmlns:p="http://schemas.openxmlformats.org/presentationml/2006/main" matchingName="Section title and description">
   <p:cSld name="SECTION_TITLE_AND_DESCRIPTION">
     <p:spTree>
@@ -4627,7 +3073,7 @@
 </p:sldLayout>
 </file>
 
-<file path=ppt/slideLayouts/slideLayout9.xml><?xml version="1.0" encoding="utf-8"?>
+<file path=ppt/slideLayouts/slideLayout7.xml><?xml version="1.0" encoding="utf-8"?>
 <p:sldLayout xmlns:a="http://schemas.openxmlformats.org/drawingml/2006/main" xmlns:r="http://schemas.openxmlformats.org/officeDocument/2006/relationships" xmlns:p="http://schemas.openxmlformats.org/presentationml/2006/main" matchingName="Caption">
   <p:cSld name="CAPTION_ONLY">
     <p:spTree>
@@ -4691,6 +3137,474 @@
       <p:sp>
         <p:nvSpPr>
           <p:cNvPr id="43" name="Google Shape;43;p10"/>
+          <p:cNvSpPr txBox="1">
+            <a:spLocks noGrp="1"/>
+          </p:cNvSpPr>
+          <p:nvPr>
+            <p:ph type="sldNum" idx="12"/>
+          </p:nvPr>
+        </p:nvSpPr>
+        <p:spPr>
+          <a:xfrm>
+            <a:off x="8472458" y="4663217"/>
+            <a:ext cx="548700" cy="393600"/>
+          </a:xfrm>
+          <a:prstGeom prst="rect">
+            <a:avLst/>
+          </a:prstGeom>
+        </p:spPr>
+        <p:txBody>
+          <a:bodyPr spcFirstLastPara="1" wrap="square" lIns="91425" tIns="91425" rIns="91425" bIns="91425" anchor="ctr" anchorCtr="0">
+            <a:normAutofit/>
+          </a:bodyPr>
+          <a:lstStyle>
+            <a:lvl1pPr lvl="0">
+              <a:buNone/>
+              <a:defRPr/>
+            </a:lvl1pPr>
+            <a:lvl2pPr lvl="1">
+              <a:buNone/>
+              <a:defRPr/>
+            </a:lvl2pPr>
+            <a:lvl3pPr lvl="2">
+              <a:buNone/>
+              <a:defRPr/>
+            </a:lvl3pPr>
+            <a:lvl4pPr lvl="3">
+              <a:buNone/>
+              <a:defRPr/>
+            </a:lvl4pPr>
+            <a:lvl5pPr lvl="4">
+              <a:buNone/>
+              <a:defRPr/>
+            </a:lvl5pPr>
+            <a:lvl6pPr lvl="5">
+              <a:buNone/>
+              <a:defRPr/>
+            </a:lvl6pPr>
+            <a:lvl7pPr lvl="6">
+              <a:buNone/>
+              <a:defRPr/>
+            </a:lvl7pPr>
+            <a:lvl8pPr lvl="7">
+              <a:buNone/>
+              <a:defRPr/>
+            </a:lvl8pPr>
+            <a:lvl9pPr lvl="8">
+              <a:buNone/>
+              <a:defRPr/>
+            </a:lvl9pPr>
+          </a:lstStyle>
+          <a:p>
+            <a:pPr marL="0" lvl="0" indent="0" algn="r" rtl="0">
+              <a:spcBef>
+                <a:spcPts val="0"/>
+              </a:spcBef>
+              <a:spcAft>
+                <a:spcPts val="0"/>
+              </a:spcAft>
+              <a:buNone/>
+            </a:pPr>
+            <a:fld id="{00000000-1234-1234-1234-123412341234}" type="slidenum">
+              <a:rPr lang="en"/>
+              <a:t>‹#›</a:t>
+            </a:fld>
+            <a:endParaRPr/>
+          </a:p>
+        </p:txBody>
+      </p:sp>
+    </p:spTree>
+  </p:cSld>
+  <p:clrMapOvr>
+    <a:masterClrMapping/>
+  </p:clrMapOvr>
+</p:sldLayout>
+</file>
+
+<file path=ppt/slideLayouts/slideLayout8.xml><?xml version="1.0" encoding="utf-8"?>
+<p:sldLayout xmlns:a="http://schemas.openxmlformats.org/drawingml/2006/main" xmlns:r="http://schemas.openxmlformats.org/officeDocument/2006/relationships" xmlns:p="http://schemas.openxmlformats.org/presentationml/2006/main" matchingName="Big number">
+  <p:cSld name="BIG_NUMBER">
+    <p:spTree>
+      <p:nvGrpSpPr>
+        <p:cNvPr id="1" name="Shape 44"/>
+        <p:cNvGrpSpPr/>
+        <p:nvPr/>
+      </p:nvGrpSpPr>
+      <p:grpSpPr>
+        <a:xfrm>
+          <a:off x="0" y="0"/>
+          <a:ext cx="0" cy="0"/>
+          <a:chOff x="0" y="0"/>
+          <a:chExt cx="0" cy="0"/>
+        </a:xfrm>
+      </p:grpSpPr>
+      <p:sp>
+        <p:nvSpPr>
+          <p:cNvPr id="45" name="Google Shape;45;p11"/>
+          <p:cNvSpPr txBox="1">
+            <a:spLocks noGrp="1"/>
+          </p:cNvSpPr>
+          <p:nvPr>
+            <p:ph type="title" hasCustomPrompt="1"/>
+          </p:nvPr>
+        </p:nvSpPr>
+        <p:spPr>
+          <a:xfrm>
+            <a:off x="311700" y="1106125"/>
+            <a:ext cx="8520600" cy="1963500"/>
+          </a:xfrm>
+          <a:prstGeom prst="rect">
+            <a:avLst/>
+          </a:prstGeom>
+        </p:spPr>
+        <p:txBody>
+          <a:bodyPr spcFirstLastPara="1" wrap="square" lIns="91425" tIns="91425" rIns="91425" bIns="91425" anchor="b" anchorCtr="0">
+            <a:normAutofit/>
+          </a:bodyPr>
+          <a:lstStyle>
+            <a:lvl1pPr lvl="0" algn="ctr">
+              <a:spcBef>
+                <a:spcPts val="0"/>
+              </a:spcBef>
+              <a:spcAft>
+                <a:spcPts val="0"/>
+              </a:spcAft>
+              <a:buSzPts val="12000"/>
+              <a:buNone/>
+              <a:defRPr sz="12000"/>
+            </a:lvl1pPr>
+            <a:lvl2pPr lvl="1" algn="ctr">
+              <a:spcBef>
+                <a:spcPts val="0"/>
+              </a:spcBef>
+              <a:spcAft>
+                <a:spcPts val="0"/>
+              </a:spcAft>
+              <a:buSzPts val="12000"/>
+              <a:buNone/>
+              <a:defRPr sz="12000"/>
+            </a:lvl2pPr>
+            <a:lvl3pPr lvl="2" algn="ctr">
+              <a:spcBef>
+                <a:spcPts val="0"/>
+              </a:spcBef>
+              <a:spcAft>
+                <a:spcPts val="0"/>
+              </a:spcAft>
+              <a:buSzPts val="12000"/>
+              <a:buNone/>
+              <a:defRPr sz="12000"/>
+            </a:lvl3pPr>
+            <a:lvl4pPr lvl="3" algn="ctr">
+              <a:spcBef>
+                <a:spcPts val="0"/>
+              </a:spcBef>
+              <a:spcAft>
+                <a:spcPts val="0"/>
+              </a:spcAft>
+              <a:buSzPts val="12000"/>
+              <a:buNone/>
+              <a:defRPr sz="12000"/>
+            </a:lvl4pPr>
+            <a:lvl5pPr lvl="4" algn="ctr">
+              <a:spcBef>
+                <a:spcPts val="0"/>
+              </a:spcBef>
+              <a:spcAft>
+                <a:spcPts val="0"/>
+              </a:spcAft>
+              <a:buSzPts val="12000"/>
+              <a:buNone/>
+              <a:defRPr sz="12000"/>
+            </a:lvl5pPr>
+            <a:lvl6pPr lvl="5" algn="ctr">
+              <a:spcBef>
+                <a:spcPts val="0"/>
+              </a:spcBef>
+              <a:spcAft>
+                <a:spcPts val="0"/>
+              </a:spcAft>
+              <a:buSzPts val="12000"/>
+              <a:buNone/>
+              <a:defRPr sz="12000"/>
+            </a:lvl6pPr>
+            <a:lvl7pPr lvl="6" algn="ctr">
+              <a:spcBef>
+                <a:spcPts val="0"/>
+              </a:spcBef>
+              <a:spcAft>
+                <a:spcPts val="0"/>
+              </a:spcAft>
+              <a:buSzPts val="12000"/>
+              <a:buNone/>
+              <a:defRPr sz="12000"/>
+            </a:lvl7pPr>
+            <a:lvl8pPr lvl="7" algn="ctr">
+              <a:spcBef>
+                <a:spcPts val="0"/>
+              </a:spcBef>
+              <a:spcAft>
+                <a:spcPts val="0"/>
+              </a:spcAft>
+              <a:buSzPts val="12000"/>
+              <a:buNone/>
+              <a:defRPr sz="12000"/>
+            </a:lvl8pPr>
+            <a:lvl9pPr lvl="8" algn="ctr">
+              <a:spcBef>
+                <a:spcPts val="0"/>
+              </a:spcBef>
+              <a:spcAft>
+                <a:spcPts val="0"/>
+              </a:spcAft>
+              <a:buSzPts val="12000"/>
+              <a:buNone/>
+              <a:defRPr sz="12000"/>
+            </a:lvl9pPr>
+          </a:lstStyle>
+          <a:p>
+            <a:r>
+              <a:t>xx%</a:t>
+            </a:r>
+          </a:p>
+        </p:txBody>
+      </p:sp>
+      <p:sp>
+        <p:nvSpPr>
+          <p:cNvPr id="46" name="Google Shape;46;p11"/>
+          <p:cNvSpPr txBox="1">
+            <a:spLocks noGrp="1"/>
+          </p:cNvSpPr>
+          <p:nvPr>
+            <p:ph type="body" idx="1"/>
+          </p:nvPr>
+        </p:nvSpPr>
+        <p:spPr>
+          <a:xfrm>
+            <a:off x="311700" y="3152225"/>
+            <a:ext cx="8520600" cy="1300800"/>
+          </a:xfrm>
+          <a:prstGeom prst="rect">
+            <a:avLst/>
+          </a:prstGeom>
+        </p:spPr>
+        <p:txBody>
+          <a:bodyPr spcFirstLastPara="1" wrap="square" lIns="91425" tIns="91425" rIns="91425" bIns="91425" anchor="t" anchorCtr="0">
+            <a:normAutofit/>
+          </a:bodyPr>
+          <a:lstStyle>
+            <a:lvl1pPr marL="457200" lvl="0" indent="-342900" algn="ctr">
+              <a:spcBef>
+                <a:spcPts val="0"/>
+              </a:spcBef>
+              <a:spcAft>
+                <a:spcPts val="0"/>
+              </a:spcAft>
+              <a:buSzPts val="1800"/>
+              <a:buChar char="●"/>
+              <a:defRPr/>
+            </a:lvl1pPr>
+            <a:lvl2pPr marL="914400" lvl="1" indent="-317500" algn="ctr">
+              <a:spcBef>
+                <a:spcPts val="0"/>
+              </a:spcBef>
+              <a:spcAft>
+                <a:spcPts val="0"/>
+              </a:spcAft>
+              <a:buSzPts val="1400"/>
+              <a:buChar char="○"/>
+              <a:defRPr/>
+            </a:lvl2pPr>
+            <a:lvl3pPr marL="1371600" lvl="2" indent="-317500" algn="ctr">
+              <a:spcBef>
+                <a:spcPts val="0"/>
+              </a:spcBef>
+              <a:spcAft>
+                <a:spcPts val="0"/>
+              </a:spcAft>
+              <a:buSzPts val="1400"/>
+              <a:buChar char="■"/>
+              <a:defRPr/>
+            </a:lvl3pPr>
+            <a:lvl4pPr marL="1828800" lvl="3" indent="-317500" algn="ctr">
+              <a:spcBef>
+                <a:spcPts val="0"/>
+              </a:spcBef>
+              <a:spcAft>
+                <a:spcPts val="0"/>
+              </a:spcAft>
+              <a:buSzPts val="1400"/>
+              <a:buChar char="●"/>
+              <a:defRPr/>
+            </a:lvl4pPr>
+            <a:lvl5pPr marL="2286000" lvl="4" indent="-317500" algn="ctr">
+              <a:spcBef>
+                <a:spcPts val="0"/>
+              </a:spcBef>
+              <a:spcAft>
+                <a:spcPts val="0"/>
+              </a:spcAft>
+              <a:buSzPts val="1400"/>
+              <a:buChar char="○"/>
+              <a:defRPr/>
+            </a:lvl5pPr>
+            <a:lvl6pPr marL="2743200" lvl="5" indent="-317500" algn="ctr">
+              <a:spcBef>
+                <a:spcPts val="0"/>
+              </a:spcBef>
+              <a:spcAft>
+                <a:spcPts val="0"/>
+              </a:spcAft>
+              <a:buSzPts val="1400"/>
+              <a:buChar char="■"/>
+              <a:defRPr/>
+            </a:lvl6pPr>
+            <a:lvl7pPr marL="3200400" lvl="6" indent="-317500" algn="ctr">
+              <a:spcBef>
+                <a:spcPts val="0"/>
+              </a:spcBef>
+              <a:spcAft>
+                <a:spcPts val="0"/>
+              </a:spcAft>
+              <a:buSzPts val="1400"/>
+              <a:buChar char="●"/>
+              <a:defRPr/>
+            </a:lvl7pPr>
+            <a:lvl8pPr marL="3657600" lvl="7" indent="-317500" algn="ctr">
+              <a:spcBef>
+                <a:spcPts val="0"/>
+              </a:spcBef>
+              <a:spcAft>
+                <a:spcPts val="0"/>
+              </a:spcAft>
+              <a:buSzPts val="1400"/>
+              <a:buChar char="○"/>
+              <a:defRPr/>
+            </a:lvl8pPr>
+            <a:lvl9pPr marL="4114800" lvl="8" indent="-317500" algn="ctr">
+              <a:spcBef>
+                <a:spcPts val="0"/>
+              </a:spcBef>
+              <a:spcAft>
+                <a:spcPts val="0"/>
+              </a:spcAft>
+              <a:buSzPts val="1400"/>
+              <a:buChar char="■"/>
+              <a:defRPr/>
+            </a:lvl9pPr>
+          </a:lstStyle>
+          <a:p>
+            <a:endParaRPr/>
+          </a:p>
+        </p:txBody>
+      </p:sp>
+      <p:sp>
+        <p:nvSpPr>
+          <p:cNvPr id="47" name="Google Shape;47;p11"/>
+          <p:cNvSpPr txBox="1">
+            <a:spLocks noGrp="1"/>
+          </p:cNvSpPr>
+          <p:nvPr>
+            <p:ph type="sldNum" idx="12"/>
+          </p:nvPr>
+        </p:nvSpPr>
+        <p:spPr>
+          <a:xfrm>
+            <a:off x="8472458" y="4663217"/>
+            <a:ext cx="548700" cy="393600"/>
+          </a:xfrm>
+          <a:prstGeom prst="rect">
+            <a:avLst/>
+          </a:prstGeom>
+        </p:spPr>
+        <p:txBody>
+          <a:bodyPr spcFirstLastPara="1" wrap="square" lIns="91425" tIns="91425" rIns="91425" bIns="91425" anchor="ctr" anchorCtr="0">
+            <a:normAutofit/>
+          </a:bodyPr>
+          <a:lstStyle>
+            <a:lvl1pPr lvl="0">
+              <a:buNone/>
+              <a:defRPr/>
+            </a:lvl1pPr>
+            <a:lvl2pPr lvl="1">
+              <a:buNone/>
+              <a:defRPr/>
+            </a:lvl2pPr>
+            <a:lvl3pPr lvl="2">
+              <a:buNone/>
+              <a:defRPr/>
+            </a:lvl3pPr>
+            <a:lvl4pPr lvl="3">
+              <a:buNone/>
+              <a:defRPr/>
+            </a:lvl4pPr>
+            <a:lvl5pPr lvl="4">
+              <a:buNone/>
+              <a:defRPr/>
+            </a:lvl5pPr>
+            <a:lvl6pPr lvl="5">
+              <a:buNone/>
+              <a:defRPr/>
+            </a:lvl6pPr>
+            <a:lvl7pPr lvl="6">
+              <a:buNone/>
+              <a:defRPr/>
+            </a:lvl7pPr>
+            <a:lvl8pPr lvl="7">
+              <a:buNone/>
+              <a:defRPr/>
+            </a:lvl8pPr>
+            <a:lvl9pPr lvl="8">
+              <a:buNone/>
+              <a:defRPr/>
+            </a:lvl9pPr>
+          </a:lstStyle>
+          <a:p>
+            <a:pPr marL="0" lvl="0" indent="0" algn="r" rtl="0">
+              <a:spcBef>
+                <a:spcPts val="0"/>
+              </a:spcBef>
+              <a:spcAft>
+                <a:spcPts val="0"/>
+              </a:spcAft>
+              <a:buNone/>
+            </a:pPr>
+            <a:fld id="{00000000-1234-1234-1234-123412341234}" type="slidenum">
+              <a:rPr lang="en"/>
+              <a:t>‹#›</a:t>
+            </a:fld>
+            <a:endParaRPr/>
+          </a:p>
+        </p:txBody>
+      </p:sp>
+    </p:spTree>
+  </p:cSld>
+  <p:clrMapOvr>
+    <a:masterClrMapping/>
+  </p:clrMapOvr>
+</p:sldLayout>
+</file>
+
+<file path=ppt/slideLayouts/slideLayout9.xml><?xml version="1.0" encoding="utf-8"?>
+<p:sldLayout xmlns:a="http://schemas.openxmlformats.org/drawingml/2006/main" xmlns:r="http://schemas.openxmlformats.org/officeDocument/2006/relationships" xmlns:p="http://schemas.openxmlformats.org/presentationml/2006/main" matchingName="Blank" type="blank">
+  <p:cSld name="BLANK">
+    <p:spTree>
+      <p:nvGrpSpPr>
+        <p:cNvPr id="1" name="Shape 48"/>
+        <p:cNvGrpSpPr/>
+        <p:nvPr/>
+      </p:nvGrpSpPr>
+      <p:grpSpPr>
+        <a:xfrm>
+          <a:off x="0" y="0"/>
+          <a:ext cx="0" cy="0"/>
+          <a:chOff x="0" y="0"/>
+          <a:chExt cx="0" cy="0"/>
+        </a:xfrm>
+      </p:grpSpPr>
+      <p:sp>
+        <p:nvSpPr>
+          <p:cNvPr id="49" name="Google Shape;49;p12"/>
           <p:cNvSpPr txBox="1">
             <a:spLocks noGrp="1"/>
           </p:cNvSpPr>
@@ -5343,17 +4257,14 @@
   <p:clrMap bg1="lt1" tx1="dk1" bg2="dk2" tx2="lt2" accent1="accent1" accent2="accent2" accent3="accent3" accent4="accent4" accent5="accent5" accent6="accent6" hlink="hlink" folHlink="folHlink"/>
   <p:sldLayoutIdLst>
     <p:sldLayoutId id="2147483648" r:id="rId1"/>
-    <p:sldLayoutId id="2147483649" r:id="rId2"/>
-    <p:sldLayoutId id="2147483650" r:id="rId3"/>
-    <p:sldLayoutId id="2147483651" r:id="rId4"/>
-    <p:sldLayoutId id="2147483652" r:id="rId5"/>
-    <p:sldLayoutId id="2147483653" r:id="rId6"/>
-    <p:sldLayoutId id="2147483654" r:id="rId7"/>
-    <p:sldLayoutId id="2147483655" r:id="rId8"/>
-    <p:sldLayoutId id="2147483656" r:id="rId9"/>
-    <p:sldLayoutId id="2147483657" r:id="rId10"/>
-    <p:sldLayoutId id="2147483658" r:id="rId11"/>
-    <p:sldLayoutId id="2147483660" r:id="rId12"/>
+    <p:sldLayoutId id="2147483651" r:id="rId2"/>
+    <p:sldLayoutId id="2147483652" r:id="rId3"/>
+    <p:sldLayoutId id="2147483653" r:id="rId4"/>
+    <p:sldLayoutId id="2147483654" r:id="rId5"/>
+    <p:sldLayoutId id="2147483655" r:id="rId6"/>
+    <p:sldLayoutId id="2147483656" r:id="rId7"/>
+    <p:sldLayoutId id="2147483657" r:id="rId8"/>
+    <p:sldLayoutId id="2147483658" r:id="rId9"/>
   </p:sldLayoutIdLst>
   <p:hf sldNum="0" hdr="0" ftr="0" dt="0"/>
   <p:txStyles>
@@ -6176,103 +5087,6 @@
       </p:pic>
       <p:sp>
         <p:nvSpPr>
-          <p:cNvPr id="56" name="Google Shape;56;p13"/>
-          <p:cNvSpPr txBox="1"/>
-          <p:nvPr/>
-        </p:nvSpPr>
-        <p:spPr>
-          <a:xfrm>
-            <a:off x="972375" y="1567026"/>
-            <a:ext cx="7568100" cy="1495764"/>
-          </a:xfrm>
-          <a:prstGeom prst="rect">
-            <a:avLst/>
-          </a:prstGeom>
-          <a:noFill/>
-          <a:ln>
-            <a:noFill/>
-          </a:ln>
-        </p:spPr>
-        <p:txBody>
-          <a:bodyPr spcFirstLastPara="1" wrap="square" lIns="91425" tIns="91425" rIns="91425" bIns="91425" anchor="t" anchorCtr="0">
-            <a:spAutoFit/>
-          </a:bodyPr>
-          <a:lstStyle/>
-          <a:p>
-            <a:pPr marL="46354" algn="ctr">
-              <a:lnSpc>
-                <a:spcPct val="80000"/>
-              </a:lnSpc>
-            </a:pPr>
-            <a:r>
-              <a:rPr lang="en" sz="2650" b="1" dirty="0">
-                <a:solidFill>
-                  <a:schemeClr val="dk1"/>
-                </a:solidFill>
-                <a:latin typeface="Times New Roman"/>
-                <a:ea typeface="Times New Roman"/>
-                <a:cs typeface="Times New Roman"/>
-                <a:sym typeface="Times New Roman"/>
-              </a:rPr>
-              <a:t>23CS1ME - Mini Capstone Project</a:t>
-            </a:r>
-            <a:endParaRPr sz="2650" b="1" dirty="0">
-              <a:solidFill>
-                <a:schemeClr val="dk1"/>
-              </a:solidFill>
-              <a:latin typeface="Times New Roman"/>
-              <a:ea typeface="Times New Roman"/>
-              <a:cs typeface="Times New Roman"/>
-              <a:sym typeface="Times New Roman"/>
-            </a:endParaRPr>
-          </a:p>
-          <a:p>
-            <a:pPr marL="46354">
-              <a:lnSpc>
-                <a:spcPct val="80000"/>
-              </a:lnSpc>
-            </a:pPr>
-            <a:endParaRPr lang="en-US" sz="2650" b="1" dirty="0">
-              <a:solidFill>
-                <a:schemeClr val="dk1"/>
-              </a:solidFill>
-              <a:latin typeface="Times New Roman"/>
-              <a:ea typeface="Times New Roman"/>
-              <a:cs typeface="Times New Roman"/>
-              <a:sym typeface="Times New Roman"/>
-            </a:endParaRPr>
-          </a:p>
-          <a:p>
-            <a:pPr marL="46354" algn="ctr">
-              <a:lnSpc>
-                <a:spcPct val="80000"/>
-              </a:lnSpc>
-            </a:pPr>
-            <a:r>
-              <a:rPr lang="en-IN" sz="2700" dirty="0"/>
-              <a:t>Healthcare Data Analytics System</a:t>
-            </a:r>
-          </a:p>
-          <a:p>
-            <a:pPr marL="46354">
-              <a:lnSpc>
-                <a:spcPct val="80000"/>
-              </a:lnSpc>
-            </a:pPr>
-            <a:endParaRPr sz="2650" b="1" dirty="0">
-              <a:solidFill>
-                <a:schemeClr val="dk1"/>
-              </a:solidFill>
-              <a:latin typeface="Times New Roman"/>
-              <a:ea typeface="Times New Roman"/>
-              <a:cs typeface="Times New Roman"/>
-              <a:sym typeface="Times New Roman"/>
-            </a:endParaRPr>
-          </a:p>
-        </p:txBody>
-      </p:sp>
-      <p:sp>
-        <p:nvSpPr>
           <p:cNvPr id="57" name="Google Shape;57;p13"/>
           <p:cNvSpPr txBox="1"/>
           <p:nvPr/>
@@ -6306,20 +5120,10 @@
                 <a:cs typeface="Times New Roman"/>
                 <a:sym typeface="Times New Roman"/>
               </a:rPr>
-              <a:t>PROJECT COORDINATOR:</a:t>
+              <a:t>Tutor Name:</a:t>
             </a:r>
-            <a:endParaRPr sz="2000" dirty="0">
-              <a:solidFill>
-                <a:schemeClr val="dk1"/>
-              </a:solidFill>
-              <a:latin typeface="Times New Roman"/>
-              <a:ea typeface="Times New Roman"/>
-              <a:cs typeface="Times New Roman"/>
-              <a:sym typeface="Times New Roman"/>
-            </a:endParaRPr>
           </a:p>
           <a:p>
-            <a:pPr marL="12700"/>
             <a:r>
               <a:rPr lang="en" sz="2400" dirty="0">
                 <a:solidFill>
@@ -6330,7 +5134,21 @@
                 <a:cs typeface="Times New Roman"/>
                 <a:sym typeface="Times New Roman"/>
               </a:rPr>
-              <a:t>Ms.P.Priyadharshini, Assistant Prof/CSE</a:t>
+              <a:t> Dr.R.Rajakumari</a:t>
+            </a:r>
+          </a:p>
+          <a:p>
+            <a:r>
+              <a:rPr lang="en" sz="2400" dirty="0">
+                <a:solidFill>
+                  <a:schemeClr val="dk1"/>
+                </a:solidFill>
+                <a:latin typeface="Times New Roman"/>
+                <a:ea typeface="Times New Roman"/>
+                <a:cs typeface="Times New Roman"/>
+                <a:sym typeface="Times New Roman"/>
+              </a:rPr>
+              <a:t> Associate Prof/CSE</a:t>
             </a:r>
             <a:endParaRPr sz="2400" dirty="0">
               <a:solidFill>
@@ -6352,8 +5170,8 @@
         </p:nvSpPr>
         <p:spPr>
           <a:xfrm>
-            <a:off x="5233700" y="3452526"/>
-            <a:ext cx="3674400" cy="861744"/>
+            <a:off x="5469600" y="3898575"/>
+            <a:ext cx="3674400" cy="553968"/>
           </a:xfrm>
           <a:prstGeom prst="rect">
             <a:avLst/>
@@ -6368,29 +5186,6 @@
             <a:spAutoFit/>
           </a:bodyPr>
           <a:lstStyle/>
-          <a:p>
-            <a:r>
-              <a:rPr lang="en" sz="2000" b="1" dirty="0">
-                <a:solidFill>
-                  <a:schemeClr val="dk1"/>
-                </a:solidFill>
-                <a:latin typeface="Times New Roman"/>
-                <a:ea typeface="Times New Roman"/>
-                <a:cs typeface="Times New Roman"/>
-                <a:sym typeface="Times New Roman"/>
-              </a:rPr>
-              <a:t>SUBMITTED BY:</a:t>
-            </a:r>
-            <a:endParaRPr sz="2000" dirty="0">
-              <a:solidFill>
-                <a:schemeClr val="dk1"/>
-              </a:solidFill>
-              <a:latin typeface="Times New Roman"/>
-              <a:ea typeface="Times New Roman"/>
-              <a:cs typeface="Times New Roman"/>
-              <a:sym typeface="Times New Roman"/>
-            </a:endParaRPr>
-          </a:p>
           <a:p>
             <a:pPr marL="12700"/>
             <a:r>
@@ -6419,62 +5214,39 @@
       </p:sp>
       <p:sp>
         <p:nvSpPr>
-          <p:cNvPr id="59" name="Google Shape;59;p13"/>
+          <p:cNvPr id="3" name="TextBox 2">
+            <a:extLst>
+              <a:ext uri="{FF2B5EF4-FFF2-40B4-BE49-F238E27FC236}">
+                <a16:creationId xmlns:a16="http://schemas.microsoft.com/office/drawing/2014/main" id="{AAEB3BF4-511B-1B4A-058C-E11576F88DFA}"/>
+              </a:ext>
+            </a:extLst>
+          </p:cNvPr>
           <p:cNvSpPr txBox="1"/>
           <p:nvPr/>
         </p:nvSpPr>
         <p:spPr>
           <a:xfrm>
-            <a:off x="5336300" y="4393926"/>
-            <a:ext cx="3000000" cy="553968"/>
+            <a:off x="2404947" y="2048530"/>
+            <a:ext cx="4572000" cy="523220"/>
           </a:xfrm>
           <a:prstGeom prst="rect">
             <a:avLst/>
           </a:prstGeom>
           <a:noFill/>
-          <a:ln>
-            <a:noFill/>
-          </a:ln>
         </p:spPr>
         <p:txBody>
-          <a:bodyPr spcFirstLastPara="1" wrap="square" lIns="91425" tIns="91425" rIns="91425" bIns="91425" anchor="t" anchorCtr="0">
+          <a:bodyPr wrap="square">
             <a:spAutoFit/>
           </a:bodyPr>
           <a:lstStyle/>
           <a:p>
             <a:r>
-              <a:rPr lang="en" sz="2400" b="1" dirty="0">
-                <a:solidFill>
-                  <a:schemeClr val="dk1"/>
-                </a:solidFill>
-                <a:latin typeface="Times New Roman"/>
-                <a:ea typeface="Times New Roman"/>
-                <a:cs typeface="Times New Roman"/>
-                <a:sym typeface="Times New Roman"/>
+              <a:rPr lang="en-IN" sz="2800" dirty="0">
+                <a:latin typeface="Times New Roman" panose="02020603050405020304" pitchFamily="18" charset="0"/>
+                <a:cs typeface="Times New Roman" panose="02020603050405020304" pitchFamily="18" charset="0"/>
               </a:rPr>
-              <a:t>DATE: </a:t>
+              <a:t>Competency-Skill Mapping</a:t>
             </a:r>
-            <a:r>
-              <a:rPr lang="en" sz="2400" dirty="0">
-                <a:solidFill>
-                  <a:schemeClr val="dk1"/>
-                </a:solidFill>
-                <a:latin typeface="Times New Roman"/>
-                <a:ea typeface="Times New Roman"/>
-                <a:cs typeface="Times New Roman"/>
-                <a:sym typeface="Times New Roman"/>
-              </a:rPr>
-              <a:t>31-01-2026</a:t>
-            </a:r>
-            <a:endParaRPr sz="2400" dirty="0">
-              <a:solidFill>
-                <a:schemeClr val="dk1"/>
-              </a:solidFill>
-              <a:latin typeface="Times New Roman"/>
-              <a:ea typeface="Times New Roman"/>
-              <a:cs typeface="Times New Roman"/>
-              <a:sym typeface="Times New Roman"/>
-            </a:endParaRPr>
           </a:p>
         </p:txBody>
       </p:sp>
@@ -6486,133 +5258,7 @@
 </p:sld>
 </file>
 
-<file path=ppt/slides/slide10.xml><?xml version="1.0" encoding="utf-8"?>
-<p:sld xmlns:a="http://schemas.openxmlformats.org/drawingml/2006/main" xmlns:r="http://schemas.openxmlformats.org/officeDocument/2006/relationships" xmlns:p="http://schemas.openxmlformats.org/presentationml/2006/main">
-  <p:cSld>
-    <p:spTree>
-      <p:nvGrpSpPr>
-        <p:cNvPr id="1" name=""/>
-        <p:cNvGrpSpPr/>
-        <p:nvPr/>
-      </p:nvGrpSpPr>
-      <p:grpSpPr>
-        <a:xfrm>
-          <a:off x="0" y="0"/>
-          <a:ext cx="0" cy="0"/>
-          <a:chOff x="0" y="0"/>
-          <a:chExt cx="0" cy="0"/>
-        </a:xfrm>
-      </p:grpSpPr>
-      <p:pic>
-        <p:nvPicPr>
-          <p:cNvPr id="5" name="Picture 4">
-            <a:extLst>
-              <a:ext uri="{FF2B5EF4-FFF2-40B4-BE49-F238E27FC236}">
-                <a16:creationId xmlns:a16="http://schemas.microsoft.com/office/drawing/2014/main" id="{555BE994-3D26-CFD2-DE8A-C0F805481571}"/>
-              </a:ext>
-            </a:extLst>
-          </p:cNvPr>
-          <p:cNvPicPr>
-            <a:picLocks noChangeAspect="1"/>
-          </p:cNvPicPr>
-          <p:nvPr/>
-        </p:nvPicPr>
-        <p:blipFill>
-          <a:blip r:embed="rId2"/>
-          <a:stretch>
-            <a:fillRect/>
-          </a:stretch>
-        </p:blipFill>
-        <p:spPr>
-          <a:xfrm>
-            <a:off x="4444658" y="1579059"/>
-            <a:ext cx="4535790" cy="2327352"/>
-          </a:xfrm>
-          <a:prstGeom prst="rect">
-            <a:avLst/>
-          </a:prstGeom>
-        </p:spPr>
-      </p:pic>
-      <p:sp>
-        <p:nvSpPr>
-          <p:cNvPr id="7" name="TextBox 6">
-            <a:extLst>
-              <a:ext uri="{FF2B5EF4-FFF2-40B4-BE49-F238E27FC236}">
-                <a16:creationId xmlns:a16="http://schemas.microsoft.com/office/drawing/2014/main" id="{A4B0E3E9-43FD-BD2A-CAB0-28010A4DE0B8}"/>
-              </a:ext>
-            </a:extLst>
-          </p:cNvPr>
-          <p:cNvSpPr txBox="1"/>
-          <p:nvPr/>
-        </p:nvSpPr>
-        <p:spPr>
-          <a:xfrm>
-            <a:off x="303837" y="275943"/>
-            <a:ext cx="3434576" cy="307777"/>
-          </a:xfrm>
-          <a:prstGeom prst="rect">
-            <a:avLst/>
-          </a:prstGeom>
-          <a:noFill/>
-        </p:spPr>
-        <p:txBody>
-          <a:bodyPr wrap="square" rtlCol="0">
-            <a:spAutoFit/>
-          </a:bodyPr>
-          <a:lstStyle/>
-          <a:p>
-            <a:r>
-              <a:rPr lang="en-US" b="1" dirty="0"/>
-              <a:t>Output:</a:t>
-            </a:r>
-            <a:endParaRPr lang="en-IN" b="1" dirty="0"/>
-          </a:p>
-        </p:txBody>
-      </p:sp>
-      <p:pic>
-        <p:nvPicPr>
-          <p:cNvPr id="9" name="Picture 8">
-            <a:extLst>
-              <a:ext uri="{FF2B5EF4-FFF2-40B4-BE49-F238E27FC236}">
-                <a16:creationId xmlns:a16="http://schemas.microsoft.com/office/drawing/2014/main" id="{3CB4AAF0-62E5-A20B-44BE-E3D26E5E2935}"/>
-              </a:ext>
-            </a:extLst>
-          </p:cNvPr>
-          <p:cNvPicPr>
-            <a:picLocks noChangeAspect="1"/>
-          </p:cNvPicPr>
-          <p:nvPr/>
-        </p:nvPicPr>
-        <p:blipFill>
-          <a:blip r:embed="rId3"/>
-          <a:stretch>
-            <a:fillRect/>
-          </a:stretch>
-        </p:blipFill>
-        <p:spPr>
-          <a:xfrm>
-            <a:off x="384322" y="833758"/>
-            <a:ext cx="3868009" cy="3475981"/>
-          </a:xfrm>
-          <a:prstGeom prst="rect">
-            <a:avLst/>
-          </a:prstGeom>
-        </p:spPr>
-      </p:pic>
-    </p:spTree>
-    <p:extLst>
-      <p:ext uri="{BB962C8B-B14F-4D97-AF65-F5344CB8AC3E}">
-        <p14:creationId xmlns:p14="http://schemas.microsoft.com/office/powerpoint/2010/main" val="1188322035"/>
-      </p:ext>
-    </p:extLst>
-  </p:cSld>
-  <p:clrMapOvr>
-    <a:masterClrMapping/>
-  </p:clrMapOvr>
-</p:sld>
-</file>
-
-<file path=ppt/slides/slide11.xml><?xml version="1.0" encoding="utf-8"?>
+<file path=ppt/slides/slide2.xml><?xml version="1.0" encoding="utf-8"?>
 <p:sld xmlns:a="http://schemas.openxmlformats.org/drawingml/2006/main" xmlns:r="http://schemas.openxmlformats.org/officeDocument/2006/relationships" xmlns:p="http://schemas.openxmlformats.org/presentationml/2006/main">
   <p:cSld>
     <p:spTree>
@@ -6634,7 +5280,7 @@
           <p:cNvPr id="2" name="Title 1">
             <a:extLst>
               <a:ext uri="{FF2B5EF4-FFF2-40B4-BE49-F238E27FC236}">
-                <a16:creationId xmlns:a16="http://schemas.microsoft.com/office/drawing/2014/main" id="{BAF65AEB-9402-4814-7036-6B58BA325C47}"/>
+                <a16:creationId xmlns:a16="http://schemas.microsoft.com/office/drawing/2014/main" id="{4A081DB3-A115-9099-9249-B788AB0A24B5}"/>
               </a:ext>
             </a:extLst>
           </p:cNvPr>
@@ -6642,19 +5288,25 @@
             <a:spLocks noGrp="1"/>
           </p:cNvSpPr>
           <p:nvPr>
-            <p:ph type="title"/>
+            <p:ph type="ctrTitle"/>
           </p:nvPr>
         </p:nvSpPr>
-        <p:spPr/>
+        <p:spPr>
+          <a:xfrm>
+            <a:off x="311700" y="348275"/>
+            <a:ext cx="8520608" cy="792600"/>
+          </a:xfrm>
+        </p:spPr>
         <p:txBody>
           <a:bodyPr>
             <a:normAutofit fontScale="90000"/>
           </a:bodyPr>
           <a:lstStyle/>
           <a:p>
+            <a:pPr algn="l"/>
             <a:r>
               <a:rPr lang="en-US" dirty="0"/>
-              <a:t>Project Plan and Milestones:</a:t>
+              <a:t>Objective</a:t>
             </a:r>
             <a:endParaRPr lang="en-IN" dirty="0"/>
           </a:p>
@@ -6662,227 +5314,57 @@
       </p:sp>
       <p:sp>
         <p:nvSpPr>
-          <p:cNvPr id="5" name="TextBox 4">
+          <p:cNvPr id="3" name="Subtitle 2">
             <a:extLst>
               <a:ext uri="{FF2B5EF4-FFF2-40B4-BE49-F238E27FC236}">
-                <a16:creationId xmlns:a16="http://schemas.microsoft.com/office/drawing/2014/main" id="{22BB6E94-855E-5934-6D3F-4A3B5143B6E7}"/>
+                <a16:creationId xmlns:a16="http://schemas.microsoft.com/office/drawing/2014/main" id="{76323C74-2BE2-83CC-57B2-4C00E69E1ED6}"/>
               </a:ext>
             </a:extLst>
           </p:cNvPr>
-          <p:cNvSpPr txBox="1"/>
-          <p:nvPr/>
+          <p:cNvSpPr>
+            <a:spLocks noGrp="1"/>
+          </p:cNvSpPr>
+          <p:nvPr>
+            <p:ph type="subTitle" idx="1"/>
+          </p:nvPr>
         </p:nvSpPr>
         <p:spPr>
           <a:xfrm>
-            <a:off x="408878" y="1278673"/>
-            <a:ext cx="7411844" cy="3323987"/>
+            <a:off x="140706" y="1226633"/>
+            <a:ext cx="8520608" cy="3345366"/>
           </a:xfrm>
-          <a:prstGeom prst="rect">
-            <a:avLst/>
-          </a:prstGeom>
-          <a:noFill/>
         </p:spPr>
         <p:txBody>
-          <a:bodyPr wrap="square" rtlCol="0">
-            <a:spAutoFit/>
+          <a:bodyPr>
+            <a:normAutofit fontScale="62500" lnSpcReduction="20000"/>
           </a:bodyPr>
           <a:lstStyle/>
           <a:p>
-            <a:pPr lvl="0" eaLnBrk="0" fontAlgn="base" hangingPunct="0">
-              <a:spcBef>
-                <a:spcPct val="0"/>
-              </a:spcBef>
-              <a:spcAft>
-                <a:spcPct val="0"/>
-              </a:spcAft>
-              <a:buClrTx/>
-              <a:buFontTx/>
+            <a:pPr marL="571500" indent="-457200" algn="l">
+              <a:buFont typeface="Arial" panose="020B0604020202020204" pitchFamily="34" charset="0"/>
               <a:buChar char="•"/>
             </a:pPr>
             <a:r>
-              <a:rPr lang="en-US" altLang="en-US" b="1" dirty="0">
-                <a:solidFill>
-                  <a:schemeClr val="tx1"/>
-                </a:solidFill>
-                <a:latin typeface="Arial" panose="020B0604020202020204" pitchFamily="34" charset="0"/>
-              </a:rPr>
-              <a:t>Phase 1: Requirement Analysis &amp; Dataset Collection</a:t>
-            </a:r>
-            <a:br>
-              <a:rPr lang="en-US" altLang="en-US" dirty="0">
-                <a:solidFill>
-                  <a:schemeClr val="tx1"/>
-                </a:solidFill>
-                <a:latin typeface="Arial" panose="020B0604020202020204" pitchFamily="34" charset="0"/>
-              </a:rPr>
-            </a:br>
-            <a:r>
-              <a:rPr lang="en-US" altLang="en-US" dirty="0">
-                <a:solidFill>
-                  <a:schemeClr val="tx1"/>
-                </a:solidFill>
-                <a:latin typeface="Arial" panose="020B0604020202020204" pitchFamily="34" charset="0"/>
-              </a:rPr>
-              <a:t>– Studied healthcare problem, collected symptoms–disease dataset, and finalized project scope.</a:t>
+              <a:rPr lang="en-US" dirty="0"/>
+              <a:t>I am an ambitious Computer Science student with a strong foundation in programming, data analytics, and problem-solving. I have hands-on experience in SQL, Python, ETL processes, data visualization, and basic machine learning, along with a solid understanding of statistics and database management. I aim to apply my technical knowledge to analyze complex datasets, extract meaningful insights, and build efficient data-driven solutions.</a:t>
             </a:r>
           </a:p>
           <a:p>
-            <a:pPr lvl="0" eaLnBrk="0" fontAlgn="base" hangingPunct="0">
-              <a:spcBef>
-                <a:spcPct val="0"/>
-              </a:spcBef>
-              <a:spcAft>
-                <a:spcPct val="0"/>
-              </a:spcAft>
-              <a:buClrTx/>
-              <a:buFontTx/>
+            <a:pPr marL="114300" indent="0" algn="l"/>
+            <a:endParaRPr lang="en-US" dirty="0"/>
+          </a:p>
+          <a:p>
+            <a:pPr marL="571500" indent="-457200" algn="l">
+              <a:buFont typeface="Arial" panose="020B0604020202020204" pitchFamily="34" charset="0"/>
               <a:buChar char="•"/>
             </a:pPr>
             <a:r>
-              <a:rPr lang="en-US" altLang="en-US" b="1" dirty="0">
-                <a:solidFill>
-                  <a:schemeClr val="tx1"/>
-                </a:solidFill>
-                <a:latin typeface="Arial" panose="020B0604020202020204" pitchFamily="34" charset="0"/>
-              </a:rPr>
-              <a:t>Phase 2: Data Preprocessing &amp; Feature Engineering</a:t>
-            </a:r>
-            <a:br>
-              <a:rPr lang="en-US" altLang="en-US" dirty="0">
-                <a:solidFill>
-                  <a:schemeClr val="tx1"/>
-                </a:solidFill>
-                <a:latin typeface="Arial" panose="020B0604020202020204" pitchFamily="34" charset="0"/>
-              </a:rPr>
-            </a:br>
-            <a:r>
-              <a:rPr lang="en-US" altLang="en-US" dirty="0">
-                <a:solidFill>
-                  <a:schemeClr val="tx1"/>
-                </a:solidFill>
-                <a:latin typeface="Arial" panose="020B0604020202020204" pitchFamily="34" charset="0"/>
-              </a:rPr>
-              <a:t>– Cleaned symptom text, handled age and gender data, and prepared features for ML model.</a:t>
+              <a:rPr lang="en-US" dirty="0"/>
+              <a:t>I am seeking an entry-level opportunity in the fields of Data Analytics, Data Engineering, or Data Science where I can contribute to scalable data pipeline development, advanced analytical solutions, and intelligent decision-making systems. My goal is to continuously enhance my technical expertise, adapt to emerging technologies, and grow into a well-rounded data professional while delivering measurable business impact.</a:t>
             </a:r>
           </a:p>
           <a:p>
-            <a:pPr lvl="0" eaLnBrk="0" fontAlgn="base" hangingPunct="0">
-              <a:spcBef>
-                <a:spcPct val="0"/>
-              </a:spcBef>
-              <a:spcAft>
-                <a:spcPct val="0"/>
-              </a:spcAft>
-              <a:buClrTx/>
-              <a:buFontTx/>
-              <a:buChar char="•"/>
-            </a:pPr>
-            <a:r>
-              <a:rPr lang="en-US" altLang="en-US" b="1" dirty="0">
-                <a:solidFill>
-                  <a:schemeClr val="tx1"/>
-                </a:solidFill>
-                <a:latin typeface="Arial" panose="020B0604020202020204" pitchFamily="34" charset="0"/>
-              </a:rPr>
-              <a:t>Phase 3: Machine Learning Model Development</a:t>
-            </a:r>
-            <a:br>
-              <a:rPr lang="en-US" altLang="en-US" dirty="0">
-                <a:solidFill>
-                  <a:schemeClr val="tx1"/>
-                </a:solidFill>
-                <a:latin typeface="Arial" panose="020B0604020202020204" pitchFamily="34" charset="0"/>
-              </a:rPr>
-            </a:br>
-            <a:r>
-              <a:rPr lang="en-US" altLang="en-US" dirty="0">
-                <a:solidFill>
-                  <a:schemeClr val="tx1"/>
-                </a:solidFill>
-                <a:latin typeface="Arial" panose="020B0604020202020204" pitchFamily="34" charset="0"/>
-              </a:rPr>
-              <a:t>– Implemented Naive Bayes algorithm and generated disease predictions with probabilities.</a:t>
-            </a:r>
-          </a:p>
-          <a:p>
-            <a:pPr lvl="0" eaLnBrk="0" fontAlgn="base" hangingPunct="0">
-              <a:spcBef>
-                <a:spcPct val="0"/>
-              </a:spcBef>
-              <a:spcAft>
-                <a:spcPct val="0"/>
-              </a:spcAft>
-              <a:buClrTx/>
-              <a:buFontTx/>
-              <a:buChar char="•"/>
-            </a:pPr>
-            <a:r>
-              <a:rPr lang="en-US" altLang="en-US" b="1" dirty="0">
-                <a:solidFill>
-                  <a:schemeClr val="tx1"/>
-                </a:solidFill>
-                <a:latin typeface="Arial" panose="020B0604020202020204" pitchFamily="34" charset="0"/>
-              </a:rPr>
-              <a:t>Phase 4: System Integration &amp; UI Development</a:t>
-            </a:r>
-            <a:br>
-              <a:rPr lang="en-US" altLang="en-US" dirty="0">
-                <a:solidFill>
-                  <a:schemeClr val="tx1"/>
-                </a:solidFill>
-                <a:latin typeface="Arial" panose="020B0604020202020204" pitchFamily="34" charset="0"/>
-              </a:rPr>
-            </a:br>
-            <a:r>
-              <a:rPr lang="en-US" altLang="en-US" dirty="0">
-                <a:solidFill>
-                  <a:schemeClr val="tx1"/>
-                </a:solidFill>
-                <a:latin typeface="Arial" panose="020B0604020202020204" pitchFamily="34" charset="0"/>
-              </a:rPr>
-              <a:t>– Integrated ML model with backend and developed a web-based user interface for input and output.</a:t>
-            </a:r>
-          </a:p>
-          <a:p>
-            <a:pPr lvl="0" eaLnBrk="0" fontAlgn="base" hangingPunct="0">
-              <a:spcBef>
-                <a:spcPct val="0"/>
-              </a:spcBef>
-              <a:spcAft>
-                <a:spcPct val="0"/>
-              </a:spcAft>
-              <a:buClrTx/>
-              <a:buFontTx/>
-              <a:buChar char="•"/>
-            </a:pPr>
-            <a:r>
-              <a:rPr lang="en-US" altLang="en-US" b="1" dirty="0">
-                <a:solidFill>
-                  <a:schemeClr val="tx1"/>
-                </a:solidFill>
-                <a:latin typeface="Arial" panose="020B0604020202020204" pitchFamily="34" charset="0"/>
-              </a:rPr>
-              <a:t>Phase 5: Testing, Evaluation &amp; Finalization</a:t>
-            </a:r>
-            <a:br>
-              <a:rPr lang="en-US" altLang="en-US" dirty="0">
-                <a:solidFill>
-                  <a:schemeClr val="tx1"/>
-                </a:solidFill>
-                <a:latin typeface="Arial" panose="020B0604020202020204" pitchFamily="34" charset="0"/>
-              </a:rPr>
-            </a:br>
-            <a:r>
-              <a:rPr lang="en-US" altLang="en-US" dirty="0">
-                <a:solidFill>
-                  <a:schemeClr val="tx1"/>
-                </a:solidFill>
-                <a:latin typeface="Arial" panose="020B0604020202020204" pitchFamily="34" charset="0"/>
-              </a:rPr>
-              <a:t>– Tested system accuracy, refined outputs (High/Medium/Low), and prepared documentation and presentation.</a:t>
-            </a:r>
-          </a:p>
-          <a:p>
+            <a:pPr algn="l"/>
             <a:endParaRPr lang="en-IN" dirty="0"/>
           </a:p>
         </p:txBody>
@@ -6890,7 +5372,7 @@
     </p:spTree>
     <p:extLst>
       <p:ext uri="{BB962C8B-B14F-4D97-AF65-F5344CB8AC3E}">
-        <p14:creationId xmlns:p14="http://schemas.microsoft.com/office/powerpoint/2010/main" val="2607136079"/>
+        <p14:creationId xmlns:p14="http://schemas.microsoft.com/office/powerpoint/2010/main" val="840568725"/>
       </p:ext>
     </p:extLst>
   </p:cSld>
@@ -6900,960 +5382,7 @@
 </p:sld>
 </file>
 
-<file path=ppt/slides/slide12.xml><?xml version="1.0" encoding="utf-8"?>
-<p:sld xmlns:a="http://schemas.openxmlformats.org/drawingml/2006/main" xmlns:r="http://schemas.openxmlformats.org/officeDocument/2006/relationships" xmlns:p="http://schemas.openxmlformats.org/presentationml/2006/main">
-  <p:cSld>
-    <p:spTree>
-      <p:nvGrpSpPr>
-        <p:cNvPr id="1" name=""/>
-        <p:cNvGrpSpPr/>
-        <p:nvPr/>
-      </p:nvGrpSpPr>
-      <p:grpSpPr>
-        <a:xfrm>
-          <a:off x="0" y="0"/>
-          <a:ext cx="0" cy="0"/>
-          <a:chOff x="0" y="0"/>
-          <a:chExt cx="0" cy="0"/>
-        </a:xfrm>
-      </p:grpSpPr>
-      <p:sp>
-        <p:nvSpPr>
-          <p:cNvPr id="3" name="Content Placeholder 2">
-            <a:extLst>
-              <a:ext uri="{FF2B5EF4-FFF2-40B4-BE49-F238E27FC236}">
-                <a16:creationId xmlns:a16="http://schemas.microsoft.com/office/drawing/2014/main" id="{6E5384C7-F76C-4E31-6B8D-DF6173AC765E}"/>
-              </a:ext>
-            </a:extLst>
-          </p:cNvPr>
-          <p:cNvSpPr>
-            <a:spLocks noGrp="1"/>
-          </p:cNvSpPr>
-          <p:nvPr>
-            <p:ph idx="1"/>
-          </p:nvPr>
-        </p:nvSpPr>
-        <p:spPr>
-          <a:xfrm>
-            <a:off x="3285359" y="2215002"/>
-            <a:ext cx="3033666" cy="713496"/>
-          </a:xfrm>
-        </p:spPr>
-        <p:txBody>
-          <a:bodyPr/>
-          <a:lstStyle/>
-          <a:p>
-            <a:pPr marL="114300" indent="0">
-              <a:buNone/>
-            </a:pPr>
-            <a:r>
-              <a:rPr lang="en-US" b="1" dirty="0">
-                <a:solidFill>
-                  <a:schemeClr val="tx1">
-                    <a:lumMod val="95000"/>
-                    <a:lumOff val="5000"/>
-                  </a:schemeClr>
-                </a:solidFill>
-              </a:rPr>
-              <a:t>THANK YOU</a:t>
-            </a:r>
-            <a:endParaRPr lang="en-IN" b="1" dirty="0">
-              <a:solidFill>
-                <a:schemeClr val="tx1">
-                  <a:lumMod val="95000"/>
-                  <a:lumOff val="5000"/>
-                </a:schemeClr>
-              </a:solidFill>
-            </a:endParaRPr>
-          </a:p>
-        </p:txBody>
-      </p:sp>
-    </p:spTree>
-    <p:extLst>
-      <p:ext uri="{BB962C8B-B14F-4D97-AF65-F5344CB8AC3E}">
-        <p14:creationId xmlns:p14="http://schemas.microsoft.com/office/powerpoint/2010/main" val="2136867436"/>
-      </p:ext>
-    </p:extLst>
-  </p:cSld>
-  <p:clrMapOvr>
-    <a:masterClrMapping/>
-  </p:clrMapOvr>
-</p:sld>
-</file>
-
-<file path=ppt/slides/slide2.xml><?xml version="1.0" encoding="utf-8"?>
-<p:sld xmlns:a="http://schemas.openxmlformats.org/drawingml/2006/main" xmlns:r="http://schemas.openxmlformats.org/officeDocument/2006/relationships" xmlns:p="http://schemas.openxmlformats.org/presentationml/2006/main">
-  <p:cSld>
-    <p:spTree>
-      <p:nvGrpSpPr>
-        <p:cNvPr id="1" name="Shape 63"/>
-        <p:cNvGrpSpPr/>
-        <p:nvPr/>
-      </p:nvGrpSpPr>
-      <p:grpSpPr>
-        <a:xfrm>
-          <a:off x="0" y="0"/>
-          <a:ext cx="0" cy="0"/>
-          <a:chOff x="0" y="0"/>
-          <a:chExt cx="0" cy="0"/>
-        </a:xfrm>
-      </p:grpSpPr>
-      <p:sp>
-        <p:nvSpPr>
-          <p:cNvPr id="64" name="Google Shape;64;p14"/>
-          <p:cNvSpPr txBox="1"/>
-          <p:nvPr/>
-        </p:nvSpPr>
-        <p:spPr>
-          <a:xfrm>
-            <a:off x="2959025" y="0"/>
-            <a:ext cx="2539200" cy="800400"/>
-          </a:xfrm>
-          <a:prstGeom prst="rect">
-            <a:avLst/>
-          </a:prstGeom>
-          <a:noFill/>
-          <a:ln>
-            <a:noFill/>
-          </a:ln>
-        </p:spPr>
-        <p:txBody>
-          <a:bodyPr spcFirstLastPara="1" wrap="square" lIns="91425" tIns="91425" rIns="91425" bIns="91425" anchor="t" anchorCtr="0">
-            <a:spAutoFit/>
-          </a:bodyPr>
-          <a:lstStyle/>
-          <a:p>
-            <a:pPr marL="12700" lvl="0" indent="0" algn="l" rtl="0">
-              <a:spcBef>
-                <a:spcPts val="0"/>
-              </a:spcBef>
-              <a:spcAft>
-                <a:spcPts val="0"/>
-              </a:spcAft>
-              <a:buNone/>
-            </a:pPr>
-            <a:r>
-              <a:rPr lang="en" sz="4000" b="1">
-                <a:solidFill>
-                  <a:schemeClr val="dk1"/>
-                </a:solidFill>
-                <a:latin typeface="Times New Roman"/>
-                <a:ea typeface="Times New Roman"/>
-                <a:cs typeface="Times New Roman"/>
-                <a:sym typeface="Times New Roman"/>
-              </a:rPr>
-              <a:t>AGENDA</a:t>
-            </a:r>
-            <a:endParaRPr/>
-          </a:p>
-        </p:txBody>
-      </p:sp>
-      <p:sp>
-        <p:nvSpPr>
-          <p:cNvPr id="65" name="Google Shape;65;p14"/>
-          <p:cNvSpPr txBox="1"/>
-          <p:nvPr/>
-        </p:nvSpPr>
-        <p:spPr>
-          <a:xfrm>
-            <a:off x="504950" y="1025188"/>
-            <a:ext cx="6714900" cy="3093124"/>
-          </a:xfrm>
-          <a:prstGeom prst="rect">
-            <a:avLst/>
-          </a:prstGeom>
-          <a:noFill/>
-          <a:ln>
-            <a:noFill/>
-          </a:ln>
-        </p:spPr>
-        <p:txBody>
-          <a:bodyPr spcFirstLastPara="1" wrap="square" lIns="91425" tIns="91425" rIns="91425" bIns="91425" anchor="t" anchorCtr="0">
-            <a:spAutoFit/>
-          </a:bodyPr>
-          <a:lstStyle/>
-          <a:p>
-            <a:pPr marL="342900" indent="-342900">
-              <a:lnSpc>
-                <a:spcPct val="150000"/>
-              </a:lnSpc>
-              <a:buFont typeface="+mj-lt"/>
-              <a:buAutoNum type="arabicPeriod"/>
-            </a:pPr>
-            <a:r>
-              <a:rPr lang="en-US" sz="1800" dirty="0">
-                <a:latin typeface="Times New Roman" panose="02020603050405020304" pitchFamily="18" charset="0"/>
-                <a:cs typeface="Times New Roman" panose="02020603050405020304" pitchFamily="18" charset="0"/>
-              </a:rPr>
-              <a:t>Problem Statement &amp; Project Motivation</a:t>
-            </a:r>
-          </a:p>
-          <a:p>
-            <a:pPr marL="342900" indent="-342900">
-              <a:lnSpc>
-                <a:spcPct val="150000"/>
-              </a:lnSpc>
-              <a:buFont typeface="+mj-lt"/>
-              <a:buAutoNum type="arabicPeriod"/>
-            </a:pPr>
-            <a:r>
-              <a:rPr lang="en-US" sz="1800" dirty="0">
-                <a:latin typeface="Times New Roman" panose="02020603050405020304" pitchFamily="18" charset="0"/>
-                <a:cs typeface="Times New Roman" panose="02020603050405020304" pitchFamily="18" charset="0"/>
-              </a:rPr>
-              <a:t>System Architecture &amp; Workflow Diagram</a:t>
-            </a:r>
-          </a:p>
-          <a:p>
-            <a:pPr marL="342900" indent="-342900">
-              <a:lnSpc>
-                <a:spcPct val="150000"/>
-              </a:lnSpc>
-              <a:buFont typeface="+mj-lt"/>
-              <a:buAutoNum type="arabicPeriod"/>
-            </a:pPr>
-            <a:r>
-              <a:rPr lang="en-US" sz="1800" dirty="0">
-                <a:latin typeface="Times New Roman" panose="02020603050405020304" pitchFamily="18" charset="0"/>
-                <a:cs typeface="Times New Roman" panose="02020603050405020304" pitchFamily="18" charset="0"/>
-              </a:rPr>
-              <a:t>Database / Model / Pipeline Design</a:t>
-            </a:r>
-          </a:p>
-          <a:p>
-            <a:pPr marL="342900" indent="-342900">
-              <a:lnSpc>
-                <a:spcPct val="150000"/>
-              </a:lnSpc>
-              <a:buFont typeface="+mj-lt"/>
-              <a:buAutoNum type="arabicPeriod"/>
-            </a:pPr>
-            <a:r>
-              <a:rPr lang="en-US" sz="1800" dirty="0">
-                <a:latin typeface="Times New Roman" panose="02020603050405020304" pitchFamily="18" charset="0"/>
-                <a:cs typeface="Times New Roman" panose="02020603050405020304" pitchFamily="18" charset="0"/>
-              </a:rPr>
-              <a:t>Algorithm / Model Selection Justification</a:t>
-            </a:r>
-          </a:p>
-          <a:p>
-            <a:pPr marL="342900" indent="-342900">
-              <a:lnSpc>
-                <a:spcPct val="150000"/>
-              </a:lnSpc>
-              <a:buFont typeface="+mj-lt"/>
-              <a:buAutoNum type="arabicPeriod"/>
-            </a:pPr>
-            <a:r>
-              <a:rPr lang="en-US" sz="1800" dirty="0">
-                <a:latin typeface="Times New Roman" panose="02020603050405020304" pitchFamily="18" charset="0"/>
-                <a:cs typeface="Times New Roman" panose="02020603050405020304" pitchFamily="18" charset="0"/>
-              </a:rPr>
-              <a:t>Model Prototype Demonstration</a:t>
-            </a:r>
-          </a:p>
-          <a:p>
-            <a:pPr marL="342900" indent="-342900">
-              <a:lnSpc>
-                <a:spcPct val="150000"/>
-              </a:lnSpc>
-              <a:buFont typeface="+mj-lt"/>
-              <a:buAutoNum type="arabicPeriod"/>
-            </a:pPr>
-            <a:r>
-              <a:rPr lang="en-US" sz="1800" dirty="0">
-                <a:latin typeface="Times New Roman" panose="02020603050405020304" pitchFamily="18" charset="0"/>
-                <a:cs typeface="Times New Roman" panose="02020603050405020304" pitchFamily="18" charset="0"/>
-              </a:rPr>
-              <a:t>50% Implementation Progress</a:t>
-            </a:r>
-          </a:p>
-          <a:p>
-            <a:pPr marL="342900" indent="-342900">
-              <a:lnSpc>
-                <a:spcPct val="150000"/>
-              </a:lnSpc>
-              <a:buFont typeface="+mj-lt"/>
-              <a:buAutoNum type="arabicPeriod"/>
-            </a:pPr>
-            <a:r>
-              <a:rPr lang="en-US" sz="1800" dirty="0">
-                <a:latin typeface="Times New Roman" panose="02020603050405020304" pitchFamily="18" charset="0"/>
-                <a:cs typeface="Times New Roman" panose="02020603050405020304" pitchFamily="18" charset="0"/>
-              </a:rPr>
-              <a:t>Conclusion &amp; Future Work</a:t>
-            </a:r>
-          </a:p>
-        </p:txBody>
-      </p:sp>
-    </p:spTree>
-  </p:cSld>
-  <p:clrMapOvr>
-    <a:masterClrMapping/>
-  </p:clrMapOvr>
-</p:sld>
-</file>
-
 <file path=ppt/slides/slide3.xml><?xml version="1.0" encoding="utf-8"?>
-<p:sld xmlns:a="http://schemas.openxmlformats.org/drawingml/2006/main" xmlns:r="http://schemas.openxmlformats.org/officeDocument/2006/relationships" xmlns:p="http://schemas.openxmlformats.org/presentationml/2006/main">
-  <p:cSld>
-    <p:spTree>
-      <p:nvGrpSpPr>
-        <p:cNvPr id="1" name="Shape 69"/>
-        <p:cNvGrpSpPr/>
-        <p:nvPr/>
-      </p:nvGrpSpPr>
-      <p:grpSpPr>
-        <a:xfrm>
-          <a:off x="0" y="0"/>
-          <a:ext cx="0" cy="0"/>
-          <a:chOff x="0" y="0"/>
-          <a:chExt cx="0" cy="0"/>
-        </a:xfrm>
-      </p:grpSpPr>
-      <p:sp>
-        <p:nvSpPr>
-          <p:cNvPr id="70" name="Google Shape;70;p15"/>
-          <p:cNvSpPr txBox="1"/>
-          <p:nvPr/>
-        </p:nvSpPr>
-        <p:spPr>
-          <a:xfrm>
-            <a:off x="1207950" y="272125"/>
-            <a:ext cx="6728100" cy="861900"/>
-          </a:xfrm>
-          <a:prstGeom prst="rect">
-            <a:avLst/>
-          </a:prstGeom>
-          <a:noFill/>
-          <a:ln>
-            <a:noFill/>
-          </a:ln>
-        </p:spPr>
-        <p:txBody>
-          <a:bodyPr spcFirstLastPara="1" wrap="square" lIns="91425" tIns="91425" rIns="91425" bIns="91425" anchor="t" anchorCtr="0">
-            <a:spAutoFit/>
-          </a:bodyPr>
-          <a:lstStyle/>
-          <a:p>
-            <a:pPr marL="0" lvl="0" indent="0" algn="l" rtl="0">
-              <a:spcBef>
-                <a:spcPts val="0"/>
-              </a:spcBef>
-              <a:spcAft>
-                <a:spcPts val="0"/>
-              </a:spcAft>
-              <a:buNone/>
-            </a:pPr>
-            <a:r>
-              <a:rPr lang="en" sz="4400" b="1">
-                <a:solidFill>
-                  <a:schemeClr val="dk1"/>
-                </a:solidFill>
-                <a:latin typeface="Times New Roman"/>
-                <a:ea typeface="Times New Roman"/>
-                <a:cs typeface="Times New Roman"/>
-                <a:sym typeface="Times New Roman"/>
-              </a:rPr>
-              <a:t>PROBLEM STATEMENT</a:t>
-            </a:r>
-            <a:endParaRPr sz="4400" b="1">
-              <a:solidFill>
-                <a:schemeClr val="dk1"/>
-              </a:solidFill>
-              <a:latin typeface="Times New Roman"/>
-              <a:ea typeface="Times New Roman"/>
-              <a:cs typeface="Times New Roman"/>
-              <a:sym typeface="Times New Roman"/>
-            </a:endParaRPr>
-          </a:p>
-        </p:txBody>
-      </p:sp>
-      <p:sp>
-        <p:nvSpPr>
-          <p:cNvPr id="71" name="Google Shape;71;p15"/>
-          <p:cNvSpPr txBox="1"/>
-          <p:nvPr/>
-        </p:nvSpPr>
-        <p:spPr>
-          <a:xfrm>
-            <a:off x="272850" y="703075"/>
-            <a:ext cx="8598300" cy="4941322"/>
-          </a:xfrm>
-          <a:prstGeom prst="rect">
-            <a:avLst/>
-          </a:prstGeom>
-          <a:noFill/>
-          <a:ln>
-            <a:noFill/>
-          </a:ln>
-        </p:spPr>
-        <p:txBody>
-          <a:bodyPr spcFirstLastPara="1" wrap="square" lIns="91425" tIns="91425" rIns="91425" bIns="91425" anchor="t" anchorCtr="0">
-            <a:spAutoFit/>
-          </a:bodyPr>
-          <a:lstStyle/>
-          <a:p>
-            <a:pPr algn="just">
-              <a:lnSpc>
-                <a:spcPct val="115000"/>
-              </a:lnSpc>
-              <a:spcBef>
-                <a:spcPts val="1200"/>
-              </a:spcBef>
-            </a:pPr>
-            <a:br>
-              <a:rPr lang="en-US" sz="1800" dirty="0">
-                <a:latin typeface="Times New Roman" panose="02020603050405020304" pitchFamily="18" charset="0"/>
-                <a:cs typeface="Times New Roman" panose="02020603050405020304" pitchFamily="18" charset="0"/>
-              </a:rPr>
-            </a:br>
-            <a:r>
-              <a:rPr lang="en-US" sz="1800" dirty="0">
-                <a:latin typeface="Times New Roman" panose="02020603050405020304" pitchFamily="18" charset="0"/>
-                <a:cs typeface="Times New Roman" panose="02020603050405020304" pitchFamily="18" charset="0"/>
-              </a:rPr>
-              <a:t>      </a:t>
-            </a:r>
-            <a:r>
-              <a:rPr lang="en-US" sz="1800" dirty="0"/>
-              <a:t>In healthcare systems, large amounts of symptom and disease data are generated from patient records, but this data is often not effectively analyzed to support clinical understanding and decision-making. </a:t>
-            </a:r>
-          </a:p>
-          <a:p>
-            <a:pPr algn="just">
-              <a:lnSpc>
-                <a:spcPct val="115000"/>
-              </a:lnSpc>
-              <a:spcBef>
-                <a:spcPts val="1200"/>
-              </a:spcBef>
-            </a:pPr>
-            <a:r>
-              <a:rPr lang="en-US" sz="1800" dirty="0"/>
-              <a:t>     Manual analysis of symptom–disease relationships is time-consuming and prone to oversight, making it difficult to identify common disease patterns and trends. Using the Healthcare Symptoms–Disease Classification dataset, the problem is to design a Healthcare Data Analytics System that organizes, analyzes, and visualizes symptom and disease data to extract meaningful insights. </a:t>
-            </a:r>
-          </a:p>
-          <a:p>
-            <a:pPr algn="just">
-              <a:lnSpc>
-                <a:spcPct val="115000"/>
-              </a:lnSpc>
-              <a:spcBef>
-                <a:spcPts val="1200"/>
-              </a:spcBef>
-            </a:pPr>
-            <a:r>
-              <a:rPr lang="en-US" sz="1800" dirty="0"/>
-              <a:t>     The system aims to help healthcare stakeholders better understand disease occurrences, symptom associations, and overall health trends, thereby supporting informed and data-driven healthcare decisions.</a:t>
-            </a:r>
-            <a:r>
-              <a:rPr lang="en-US" sz="1800" dirty="0">
-                <a:latin typeface="Times New Roman" panose="02020603050405020304" pitchFamily="18" charset="0"/>
-                <a:cs typeface="Times New Roman" panose="02020603050405020304" pitchFamily="18" charset="0"/>
-              </a:rPr>
-              <a:t>   </a:t>
-            </a:r>
-            <a:endParaRPr lang="en-IN" sz="1800" dirty="0">
-              <a:latin typeface="Times New Roman" panose="02020603050405020304" pitchFamily="18" charset="0"/>
-              <a:cs typeface="Times New Roman" panose="02020603050405020304" pitchFamily="18" charset="0"/>
-            </a:endParaRPr>
-          </a:p>
-          <a:p>
-            <a:pPr marL="0" lvl="0" indent="0" algn="just" rtl="0">
-              <a:lnSpc>
-                <a:spcPct val="115000"/>
-              </a:lnSpc>
-              <a:spcBef>
-                <a:spcPts val="1200"/>
-              </a:spcBef>
-              <a:spcAft>
-                <a:spcPts val="0"/>
-              </a:spcAft>
-              <a:buNone/>
-            </a:pPr>
-            <a:endParaRPr sz="1800" dirty="0">
-              <a:latin typeface="Times New Roman"/>
-              <a:ea typeface="Times New Roman"/>
-              <a:cs typeface="Times New Roman"/>
-              <a:sym typeface="Times New Roman"/>
-            </a:endParaRPr>
-          </a:p>
-        </p:txBody>
-      </p:sp>
-    </p:spTree>
-  </p:cSld>
-  <p:clrMapOvr>
-    <a:masterClrMapping/>
-  </p:clrMapOvr>
-</p:sld>
-</file>
-
-<file path=ppt/slides/slide4.xml><?xml version="1.0" encoding="utf-8"?>
-<p:sld xmlns:a="http://schemas.openxmlformats.org/drawingml/2006/main" xmlns:r="http://schemas.openxmlformats.org/officeDocument/2006/relationships" xmlns:p="http://schemas.openxmlformats.org/presentationml/2006/main">
-  <p:cSld>
-    <p:spTree>
-      <p:nvGrpSpPr>
-        <p:cNvPr id="1" name="Shape 75"/>
-        <p:cNvGrpSpPr/>
-        <p:nvPr/>
-      </p:nvGrpSpPr>
-      <p:grpSpPr>
-        <a:xfrm>
-          <a:off x="0" y="0"/>
-          <a:ext cx="0" cy="0"/>
-          <a:chOff x="0" y="0"/>
-          <a:chExt cx="0" cy="0"/>
-        </a:xfrm>
-      </p:grpSpPr>
-      <p:sp>
-        <p:nvSpPr>
-          <p:cNvPr id="76" name="Google Shape;76;p16"/>
-          <p:cNvSpPr txBox="1"/>
-          <p:nvPr/>
-        </p:nvSpPr>
-        <p:spPr>
-          <a:xfrm>
-            <a:off x="1613250" y="139321"/>
-            <a:ext cx="5917500" cy="1046410"/>
-          </a:xfrm>
-          <a:prstGeom prst="rect">
-            <a:avLst/>
-          </a:prstGeom>
-          <a:noFill/>
-          <a:ln>
-            <a:noFill/>
-          </a:ln>
-        </p:spPr>
-        <p:txBody>
-          <a:bodyPr spcFirstLastPara="1" wrap="square" lIns="91425" tIns="91425" rIns="91425" bIns="91425" anchor="t" anchorCtr="0">
-            <a:spAutoFit/>
-          </a:bodyPr>
-          <a:lstStyle/>
-          <a:p>
-            <a:pPr marL="0" lvl="0" indent="0" algn="ctr" rtl="0">
-              <a:spcBef>
-                <a:spcPts val="0"/>
-              </a:spcBef>
-              <a:spcAft>
-                <a:spcPts val="0"/>
-              </a:spcAft>
-              <a:buNone/>
-            </a:pPr>
-            <a:r>
-              <a:rPr lang="en-US" sz="2800" b="1" dirty="0">
-                <a:solidFill>
-                  <a:schemeClr val="dk1"/>
-                </a:solidFill>
-                <a:latin typeface="Times New Roman"/>
-                <a:ea typeface="Times New Roman"/>
-                <a:cs typeface="Times New Roman"/>
-                <a:sym typeface="Times New Roman"/>
-              </a:rPr>
-              <a:t>System Architecture and </a:t>
-            </a:r>
-            <a:r>
-              <a:rPr lang="en-US" sz="2800" b="1" dirty="0" err="1">
-                <a:solidFill>
-                  <a:schemeClr val="dk1"/>
-                </a:solidFill>
-                <a:latin typeface="Times New Roman"/>
-                <a:ea typeface="Times New Roman"/>
-                <a:cs typeface="Times New Roman"/>
-                <a:sym typeface="Times New Roman"/>
-              </a:rPr>
-              <a:t>WorkFlow</a:t>
-            </a:r>
-            <a:r>
-              <a:rPr lang="en-US" sz="2800" b="1" dirty="0">
-                <a:solidFill>
-                  <a:schemeClr val="dk1"/>
-                </a:solidFill>
-                <a:latin typeface="Times New Roman"/>
-                <a:ea typeface="Times New Roman"/>
-                <a:cs typeface="Times New Roman"/>
-                <a:sym typeface="Times New Roman"/>
-              </a:rPr>
-              <a:t> Diagram</a:t>
-            </a:r>
-            <a:endParaRPr sz="2800" b="1" dirty="0">
-              <a:solidFill>
-                <a:schemeClr val="dk1"/>
-              </a:solidFill>
-              <a:latin typeface="Times New Roman"/>
-              <a:ea typeface="Times New Roman"/>
-              <a:cs typeface="Times New Roman"/>
-              <a:sym typeface="Times New Roman"/>
-            </a:endParaRPr>
-          </a:p>
-        </p:txBody>
-      </p:sp>
-      <p:sp>
-        <p:nvSpPr>
-          <p:cNvPr id="78" name="Google Shape;78;p16"/>
-          <p:cNvSpPr txBox="1"/>
-          <p:nvPr/>
-        </p:nvSpPr>
-        <p:spPr>
-          <a:xfrm>
-            <a:off x="617704" y="1185731"/>
-            <a:ext cx="8202600" cy="3508623"/>
-          </a:xfrm>
-          <a:prstGeom prst="rect">
-            <a:avLst/>
-          </a:prstGeom>
-          <a:noFill/>
-          <a:ln>
-            <a:noFill/>
-          </a:ln>
-        </p:spPr>
-        <p:txBody>
-          <a:bodyPr spcFirstLastPara="1" wrap="square" lIns="91425" tIns="91425" rIns="91425" bIns="91425" anchor="t" anchorCtr="0">
-            <a:spAutoFit/>
-          </a:bodyPr>
-          <a:lstStyle/>
-          <a:p>
-            <a:r>
-              <a:rPr lang="en-US" sz="1600" b="1" dirty="0"/>
-              <a:t>System Architecture</a:t>
-            </a:r>
-          </a:p>
-          <a:p>
-            <a:pPr marL="285750" indent="-285750">
-              <a:buFont typeface="Arial" panose="020B0604020202020204" pitchFamily="34" charset="0"/>
-              <a:buChar char="•"/>
-            </a:pPr>
-            <a:r>
-              <a:rPr lang="en-US" sz="1600" dirty="0"/>
-              <a:t>Modular design integrating UI, backend processing, and machine learning components</a:t>
-            </a:r>
-          </a:p>
-          <a:p>
-            <a:pPr marL="285750" indent="-285750">
-              <a:buFont typeface="Arial" panose="020B0604020202020204" pitchFamily="34" charset="0"/>
-              <a:buChar char="•"/>
-            </a:pPr>
-            <a:r>
-              <a:rPr lang="en-US" sz="1600" dirty="0"/>
-              <a:t>Ensures smooth data flow from user input to prediction output</a:t>
-            </a:r>
-          </a:p>
-          <a:p>
-            <a:br>
-              <a:rPr lang="en-US" sz="1600" dirty="0"/>
-            </a:br>
-            <a:r>
-              <a:rPr lang="en-US" sz="1600" b="1" dirty="0"/>
-              <a:t>User Interface (Frontend)</a:t>
-            </a:r>
-          </a:p>
-          <a:p>
-            <a:pPr marL="285750" indent="-285750">
-              <a:buFont typeface="Arial" panose="020B0604020202020204" pitchFamily="34" charset="0"/>
-              <a:buChar char="•"/>
-            </a:pPr>
-            <a:r>
-              <a:rPr lang="en-US" sz="1600" dirty="0"/>
-              <a:t>Collects patient details such as age, gender, and symptoms</a:t>
-            </a:r>
-          </a:p>
-          <a:p>
-            <a:pPr marL="285750" indent="-285750">
-              <a:buFont typeface="Arial" panose="020B0604020202020204" pitchFamily="34" charset="0"/>
-              <a:buChar char="•"/>
-            </a:pPr>
-            <a:r>
-              <a:rPr lang="en-US" sz="1600" dirty="0"/>
-              <a:t>Displays disease prediction with High, Medium, and Low risk levels</a:t>
-            </a:r>
-          </a:p>
-          <a:p>
-            <a:br>
-              <a:rPr lang="en-US" sz="1600" dirty="0"/>
-            </a:br>
-            <a:r>
-              <a:rPr lang="en-US" sz="1600" b="1" dirty="0"/>
-              <a:t>Application Layer (Backend)</a:t>
-            </a:r>
-          </a:p>
-          <a:p>
-            <a:pPr marL="285750" indent="-285750">
-              <a:buFont typeface="Arial" panose="020B0604020202020204" pitchFamily="34" charset="0"/>
-              <a:buChar char="•"/>
-            </a:pPr>
-            <a:r>
-              <a:rPr lang="en-US" sz="1600" dirty="0"/>
-              <a:t>Receives and validates input from the frontend</a:t>
-            </a:r>
-          </a:p>
-          <a:p>
-            <a:pPr marL="285750" indent="-285750">
-              <a:buFont typeface="Arial" panose="020B0604020202020204" pitchFamily="34" charset="0"/>
-              <a:buChar char="•"/>
-            </a:pPr>
-            <a:r>
-              <a:rPr lang="en-US" sz="1600" dirty="0"/>
-              <a:t>Coordinates preprocessing and model prediction</a:t>
-            </a:r>
-          </a:p>
-          <a:p>
-            <a:pPr marL="285750" indent="-285750">
-              <a:lnSpc>
-                <a:spcPct val="150000"/>
-              </a:lnSpc>
-              <a:buFont typeface="Wingdings" panose="05000000000000000000" pitchFamily="2" charset="2"/>
-              <a:buChar char="§"/>
-            </a:pPr>
-            <a:endParaRPr lang="en-US" sz="1600" dirty="0">
-              <a:latin typeface="Times New Roman" panose="02020603050405020304" pitchFamily="18" charset="0"/>
-              <a:cs typeface="Times New Roman" panose="02020603050405020304" pitchFamily="18" charset="0"/>
-            </a:endParaRPr>
-          </a:p>
-        </p:txBody>
-      </p:sp>
-    </p:spTree>
-  </p:cSld>
-  <p:clrMapOvr>
-    <a:masterClrMapping/>
-  </p:clrMapOvr>
-</p:sld>
-</file>
-
-<file path=ppt/slides/slide5.xml><?xml version="1.0" encoding="utf-8"?>
-<p:sld xmlns:a="http://schemas.openxmlformats.org/drawingml/2006/main" xmlns:r="http://schemas.openxmlformats.org/officeDocument/2006/relationships" xmlns:p="http://schemas.openxmlformats.org/presentationml/2006/main">
-  <p:cSld>
-    <p:spTree>
-      <p:nvGrpSpPr>
-        <p:cNvPr id="1" name=""/>
-        <p:cNvGrpSpPr/>
-        <p:nvPr/>
-      </p:nvGrpSpPr>
-      <p:grpSpPr>
-        <a:xfrm>
-          <a:off x="0" y="0"/>
-          <a:ext cx="0" cy="0"/>
-          <a:chOff x="0" y="0"/>
-          <a:chExt cx="0" cy="0"/>
-        </a:xfrm>
-      </p:grpSpPr>
-      <p:sp>
-        <p:nvSpPr>
-          <p:cNvPr id="6" name="TextBox 5">
-            <a:extLst>
-              <a:ext uri="{FF2B5EF4-FFF2-40B4-BE49-F238E27FC236}">
-                <a16:creationId xmlns:a16="http://schemas.microsoft.com/office/drawing/2014/main" id="{64B8B5E8-338D-2EA6-C6F3-0F586B476359}"/>
-              </a:ext>
-            </a:extLst>
-          </p:cNvPr>
-          <p:cNvSpPr txBox="1"/>
-          <p:nvPr/>
-        </p:nvSpPr>
-        <p:spPr>
-          <a:xfrm>
-            <a:off x="342900" y="365761"/>
-            <a:ext cx="6515100" cy="4524315"/>
-          </a:xfrm>
-          <a:prstGeom prst="rect">
-            <a:avLst/>
-          </a:prstGeom>
-          <a:noFill/>
-        </p:spPr>
-        <p:txBody>
-          <a:bodyPr wrap="square">
-            <a:spAutoFit/>
-          </a:bodyPr>
-          <a:lstStyle/>
-          <a:p>
-            <a:pPr>
-              <a:buNone/>
-            </a:pPr>
-            <a:r>
-              <a:rPr lang="en-US" sz="1800" b="1" dirty="0">
-                <a:latin typeface="Times New Roman" panose="02020603050405020304" pitchFamily="18" charset="0"/>
-                <a:cs typeface="Times New Roman" panose="02020603050405020304" pitchFamily="18" charset="0"/>
-              </a:rPr>
-              <a:t>Data Preprocessing</a:t>
-            </a:r>
-          </a:p>
-          <a:p>
-            <a:pPr>
-              <a:buFont typeface="Arial" panose="020B0604020202020204" pitchFamily="34" charset="0"/>
-              <a:buChar char="•"/>
-            </a:pPr>
-            <a:r>
-              <a:rPr lang="en-US" sz="1800" dirty="0">
-                <a:latin typeface="Times New Roman" panose="02020603050405020304" pitchFamily="18" charset="0"/>
-                <a:cs typeface="Times New Roman" panose="02020603050405020304" pitchFamily="18" charset="0"/>
-              </a:rPr>
-              <a:t>Cleans and standardizes symptom text data</a:t>
-            </a:r>
-          </a:p>
-          <a:p>
-            <a:pPr>
-              <a:buFont typeface="Arial" panose="020B0604020202020204" pitchFamily="34" charset="0"/>
-              <a:buChar char="•"/>
-            </a:pPr>
-            <a:r>
-              <a:rPr lang="en-US" sz="1800" dirty="0">
-                <a:latin typeface="Times New Roman" panose="02020603050405020304" pitchFamily="18" charset="0"/>
-                <a:cs typeface="Times New Roman" panose="02020603050405020304" pitchFamily="18" charset="0"/>
-              </a:rPr>
-              <a:t>Prepares input features for machine learning</a:t>
-            </a:r>
-          </a:p>
-          <a:p>
-            <a:pPr>
-              <a:buNone/>
-            </a:pPr>
-            <a:endParaRPr lang="en-US" sz="1800" dirty="0">
-              <a:latin typeface="Times New Roman" panose="02020603050405020304" pitchFamily="18" charset="0"/>
-              <a:cs typeface="Times New Roman" panose="02020603050405020304" pitchFamily="18" charset="0"/>
-            </a:endParaRPr>
-          </a:p>
-          <a:p>
-            <a:pPr>
-              <a:buNone/>
-            </a:pPr>
-            <a:r>
-              <a:rPr lang="en-US" sz="1800" b="1" dirty="0">
-                <a:latin typeface="Times New Roman" panose="02020603050405020304" pitchFamily="18" charset="0"/>
-                <a:cs typeface="Times New Roman" panose="02020603050405020304" pitchFamily="18" charset="0"/>
-              </a:rPr>
-              <a:t> Feature Engineering</a:t>
-            </a:r>
-          </a:p>
-          <a:p>
-            <a:pPr>
-              <a:buFont typeface="Arial" panose="020B0604020202020204" pitchFamily="34" charset="0"/>
-              <a:buChar char="•"/>
-            </a:pPr>
-            <a:r>
-              <a:rPr lang="en-US" sz="1800" dirty="0">
-                <a:latin typeface="Times New Roman" panose="02020603050405020304" pitchFamily="18" charset="0"/>
-                <a:cs typeface="Times New Roman" panose="02020603050405020304" pitchFamily="18" charset="0"/>
-              </a:rPr>
-              <a:t>Converts text symptoms into numerical vectors</a:t>
-            </a:r>
-          </a:p>
-          <a:p>
-            <a:pPr>
-              <a:buFont typeface="Arial" panose="020B0604020202020204" pitchFamily="34" charset="0"/>
-              <a:buChar char="•"/>
-            </a:pPr>
-            <a:r>
-              <a:rPr lang="en-US" sz="1800" dirty="0">
-                <a:latin typeface="Times New Roman" panose="02020603050405020304" pitchFamily="18" charset="0"/>
-                <a:cs typeface="Times New Roman" panose="02020603050405020304" pitchFamily="18" charset="0"/>
-              </a:rPr>
-              <a:t>Combines age, gender, and age group with symptom features</a:t>
-            </a:r>
-          </a:p>
-          <a:p>
-            <a:pPr>
-              <a:buNone/>
-            </a:pPr>
-            <a:endParaRPr lang="en-US" sz="1800" dirty="0">
-              <a:latin typeface="Times New Roman" panose="02020603050405020304" pitchFamily="18" charset="0"/>
-              <a:cs typeface="Times New Roman" panose="02020603050405020304" pitchFamily="18" charset="0"/>
-            </a:endParaRPr>
-          </a:p>
-          <a:p>
-            <a:pPr>
-              <a:buNone/>
-            </a:pPr>
-            <a:r>
-              <a:rPr lang="en-US" sz="1800" b="1" dirty="0">
-                <a:latin typeface="Times New Roman" panose="02020603050405020304" pitchFamily="18" charset="0"/>
-                <a:cs typeface="Times New Roman" panose="02020603050405020304" pitchFamily="18" charset="0"/>
-              </a:rPr>
-              <a:t> Machine Learning Model</a:t>
-            </a:r>
-          </a:p>
-          <a:p>
-            <a:pPr>
-              <a:buFont typeface="Arial" panose="020B0604020202020204" pitchFamily="34" charset="0"/>
-              <a:buChar char="•"/>
-            </a:pPr>
-            <a:r>
-              <a:rPr lang="en-US" sz="1800" dirty="0">
-                <a:latin typeface="Times New Roman" panose="02020603050405020304" pitchFamily="18" charset="0"/>
-                <a:cs typeface="Times New Roman" panose="02020603050405020304" pitchFamily="18" charset="0"/>
-              </a:rPr>
-              <a:t>Uses Naive Bayes classifier for disease prediction</a:t>
-            </a:r>
-          </a:p>
-          <a:p>
-            <a:pPr>
-              <a:buFont typeface="Arial" panose="020B0604020202020204" pitchFamily="34" charset="0"/>
-              <a:buChar char="•"/>
-            </a:pPr>
-            <a:r>
-              <a:rPr lang="en-US" sz="1800" dirty="0">
-                <a:latin typeface="Times New Roman" panose="02020603050405020304" pitchFamily="18" charset="0"/>
-                <a:cs typeface="Times New Roman" panose="02020603050405020304" pitchFamily="18" charset="0"/>
-              </a:rPr>
-              <a:t>Calculates probability scores for each disease</a:t>
-            </a:r>
-          </a:p>
-          <a:p>
-            <a:pPr>
-              <a:buFont typeface="Arial" panose="020B0604020202020204" pitchFamily="34" charset="0"/>
-              <a:buChar char="•"/>
-            </a:pPr>
-            <a:endParaRPr lang="en-US" sz="1800" dirty="0">
-              <a:latin typeface="Times New Roman" panose="02020603050405020304" pitchFamily="18" charset="0"/>
-              <a:cs typeface="Times New Roman" panose="02020603050405020304" pitchFamily="18" charset="0"/>
-            </a:endParaRPr>
-          </a:p>
-          <a:p>
-            <a:r>
-              <a:rPr lang="en-US" sz="1800" b="1" dirty="0">
-                <a:latin typeface="Times New Roman" panose="02020603050405020304" pitchFamily="18" charset="0"/>
-                <a:cs typeface="Times New Roman" panose="02020603050405020304" pitchFamily="18" charset="0"/>
-              </a:rPr>
-              <a:t>Result Processing</a:t>
-            </a:r>
-          </a:p>
-          <a:p>
-            <a:r>
-              <a:rPr lang="en-US" sz="1800" dirty="0">
-                <a:latin typeface="Times New Roman" panose="02020603050405020304" pitchFamily="18" charset="0"/>
-                <a:cs typeface="Times New Roman" panose="02020603050405020304" pitchFamily="18" charset="0"/>
-              </a:rPr>
-              <a:t>Ranks diseases based on prediction probabilities</a:t>
-            </a:r>
-          </a:p>
-          <a:p>
-            <a:r>
-              <a:rPr lang="en-US" sz="1800" dirty="0">
-                <a:latin typeface="Times New Roman" panose="02020603050405020304" pitchFamily="18" charset="0"/>
-                <a:cs typeface="Times New Roman" panose="02020603050405020304" pitchFamily="18" charset="0"/>
-              </a:rPr>
-              <a:t>Normalizes top three results into High, Medium, and Low risk</a:t>
-            </a:r>
-          </a:p>
-          <a:p>
-            <a:endParaRPr lang="en-US" sz="1800" dirty="0">
-              <a:latin typeface="Times New Roman" panose="02020603050405020304" pitchFamily="18" charset="0"/>
-              <a:cs typeface="Times New Roman" panose="02020603050405020304" pitchFamily="18" charset="0"/>
-            </a:endParaRPr>
-          </a:p>
-        </p:txBody>
-      </p:sp>
-    </p:spTree>
-    <p:extLst>
-      <p:ext uri="{BB962C8B-B14F-4D97-AF65-F5344CB8AC3E}">
-        <p14:creationId xmlns:p14="http://schemas.microsoft.com/office/powerpoint/2010/main" val="2873139380"/>
-      </p:ext>
-    </p:extLst>
-  </p:cSld>
-  <p:clrMapOvr>
-    <a:masterClrMapping/>
-  </p:clrMapOvr>
-</p:sld>
-</file>
-
-<file path=ppt/slides/slide6.xml><?xml version="1.0" encoding="utf-8"?>
 <p:sld xmlns:a="http://schemas.openxmlformats.org/drawingml/2006/main" xmlns:r="http://schemas.openxmlformats.org/officeDocument/2006/relationships" xmlns:p="http://schemas.openxmlformats.org/presentationml/2006/main">
   <p:cSld>
     <p:spTree>
@@ -7875,7 +5404,7 @@
           <p:cNvPr id="2" name="Title 1">
             <a:extLst>
               <a:ext uri="{FF2B5EF4-FFF2-40B4-BE49-F238E27FC236}">
-                <a16:creationId xmlns:a16="http://schemas.microsoft.com/office/drawing/2014/main" id="{32B2BDF6-640F-20D0-02C3-2F7E8DE90F7C}"/>
+                <a16:creationId xmlns:a16="http://schemas.microsoft.com/office/drawing/2014/main" id="{A2212725-7EEF-FCCF-132C-EBF1DFD37EB8}"/>
               </a:ext>
             </a:extLst>
           </p:cNvPr>
@@ -7888,118 +5417,8 @@
         </p:nvSpPr>
         <p:spPr>
           <a:xfrm>
-            <a:off x="311700" y="-60497"/>
-            <a:ext cx="8520600" cy="572700"/>
-          </a:xfrm>
-        </p:spPr>
-        <p:txBody>
-          <a:bodyPr>
-            <a:normAutofit fontScale="90000"/>
-          </a:bodyPr>
-          <a:lstStyle/>
-          <a:p>
-            <a:pPr algn="ctr"/>
-            <a:r>
-              <a:rPr lang="en-IN" b="1" dirty="0">
-                <a:latin typeface="Times New Roman"/>
-                <a:ea typeface="Times New Roman"/>
-                <a:cs typeface="Times New Roman"/>
-                <a:sym typeface="Times New Roman"/>
-              </a:rPr>
-              <a:t>Flow Diagram</a:t>
-            </a:r>
-            <a:br>
-              <a:rPr lang="en-IN" b="1" dirty="0">
-                <a:latin typeface="Times New Roman"/>
-                <a:ea typeface="Times New Roman"/>
-                <a:cs typeface="Times New Roman"/>
-                <a:sym typeface="Times New Roman"/>
-              </a:rPr>
-            </a:br>
-            <a:endParaRPr lang="en-IN" dirty="0"/>
-          </a:p>
-        </p:txBody>
-      </p:sp>
-      <p:pic>
-        <p:nvPicPr>
-          <p:cNvPr id="12" name="Picture 11">
-            <a:extLst>
-              <a:ext uri="{FF2B5EF4-FFF2-40B4-BE49-F238E27FC236}">
-                <a16:creationId xmlns:a16="http://schemas.microsoft.com/office/drawing/2014/main" id="{E75B2BE8-7DA1-0918-4D0D-4AEDFDACC2F3}"/>
-              </a:ext>
-            </a:extLst>
-          </p:cNvPr>
-          <p:cNvPicPr>
-            <a:picLocks noChangeAspect="1"/>
-          </p:cNvPicPr>
-          <p:nvPr/>
-        </p:nvPicPr>
-        <p:blipFill>
-          <a:blip r:embed="rId2"/>
-          <a:stretch>
-            <a:fillRect/>
-          </a:stretch>
-        </p:blipFill>
-        <p:spPr>
-          <a:xfrm>
-            <a:off x="2357089" y="512203"/>
-            <a:ext cx="4288479" cy="4288479"/>
-          </a:xfrm>
-          <a:prstGeom prst="rect">
-            <a:avLst/>
-          </a:prstGeom>
-        </p:spPr>
-      </p:pic>
-    </p:spTree>
-    <p:extLst>
-      <p:ext uri="{BB962C8B-B14F-4D97-AF65-F5344CB8AC3E}">
-        <p14:creationId xmlns:p14="http://schemas.microsoft.com/office/powerpoint/2010/main" val="2606695201"/>
-      </p:ext>
-    </p:extLst>
-  </p:cSld>
-  <p:clrMapOvr>
-    <a:masterClrMapping/>
-  </p:clrMapOvr>
-</p:sld>
-</file>
-
-<file path=ppt/slides/slide7.xml><?xml version="1.0" encoding="utf-8"?>
-<p:sld xmlns:a="http://schemas.openxmlformats.org/drawingml/2006/main" xmlns:r="http://schemas.openxmlformats.org/officeDocument/2006/relationships" xmlns:p="http://schemas.openxmlformats.org/presentationml/2006/main">
-  <p:cSld>
-    <p:spTree>
-      <p:nvGrpSpPr>
-        <p:cNvPr id="1" name=""/>
-        <p:cNvGrpSpPr/>
-        <p:nvPr/>
-      </p:nvGrpSpPr>
-      <p:grpSpPr>
-        <a:xfrm>
-          <a:off x="0" y="0"/>
-          <a:ext cx="0" cy="0"/>
-          <a:chOff x="0" y="0"/>
-          <a:chExt cx="0" cy="0"/>
-        </a:xfrm>
-      </p:grpSpPr>
-      <p:sp>
-        <p:nvSpPr>
-          <p:cNvPr id="2" name="Title 1">
-            <a:extLst>
-              <a:ext uri="{FF2B5EF4-FFF2-40B4-BE49-F238E27FC236}">
-                <a16:creationId xmlns:a16="http://schemas.microsoft.com/office/drawing/2014/main" id="{E566ABA2-9949-2BEE-D74B-06D6DB702B26}"/>
-              </a:ext>
-            </a:extLst>
-          </p:cNvPr>
-          <p:cNvSpPr>
-            <a:spLocks noGrp="1"/>
-          </p:cNvSpPr>
-          <p:nvPr>
-            <p:ph type="title"/>
-          </p:nvPr>
-        </p:nvSpPr>
-        <p:spPr>
-          <a:xfrm>
-            <a:off x="311700" y="262145"/>
-            <a:ext cx="8520600" cy="572700"/>
+            <a:off x="400910" y="445025"/>
+            <a:ext cx="8431390" cy="572700"/>
           </a:xfrm>
         </p:spPr>
         <p:txBody>
@@ -8010,21 +5429,18 @@
           <a:p>
             <a:r>
               <a:rPr lang="en-US" dirty="0"/>
-              <a:t>Algorithm - </a:t>
+              <a:t>Present Skills:</a:t>
             </a:r>
-            <a:r>
-              <a:rPr lang="en-IN" dirty="0"/>
-              <a:t>Naive Bayes Classifier</a:t>
-            </a:r>
+            <a:endParaRPr lang="en-IN" dirty="0"/>
           </a:p>
         </p:txBody>
       </p:sp>
       <p:sp>
         <p:nvSpPr>
-          <p:cNvPr id="4" name="Rectangle 1">
+          <p:cNvPr id="5" name="Rectangle 1">
             <a:extLst>
               <a:ext uri="{FF2B5EF4-FFF2-40B4-BE49-F238E27FC236}">
-                <a16:creationId xmlns:a16="http://schemas.microsoft.com/office/drawing/2014/main" id="{4E1B0CDE-7DF9-916F-4F8D-B63E9B5F315A}"/>
+                <a16:creationId xmlns:a16="http://schemas.microsoft.com/office/drawing/2014/main" id="{023C92C3-56DB-3298-1F8C-80CDAB5A866C}"/>
               </a:ext>
             </a:extLst>
           </p:cNvPr>
@@ -8037,8 +5453,8 @@
         </p:nvSpPr>
         <p:spPr bwMode="auto">
           <a:xfrm>
-            <a:off x="163110" y="834845"/>
-            <a:ext cx="8226510" cy="4510466"/>
+            <a:off x="817756" y="1062168"/>
+            <a:ext cx="8014544" cy="1754326"/>
           </a:xfrm>
           <a:prstGeom prst="rect">
             <a:avLst/>
@@ -8086,155 +5502,90 @@
           </a:bodyPr>
           <a:lstStyle/>
           <a:p>
-            <a:pPr marL="114300" indent="0">
-              <a:buNone/>
+            <a:pPr marL="0" marR="0" lvl="0" indent="0" algn="l" defTabSz="914400" rtl="0" eaLnBrk="0" fontAlgn="base" latinLnBrk="0" hangingPunct="0">
+              <a:lnSpc>
+                <a:spcPct val="100000"/>
+              </a:lnSpc>
+              <a:spcBef>
+                <a:spcPct val="0"/>
+              </a:spcBef>
+              <a:spcAft>
+                <a:spcPct val="0"/>
+              </a:spcAft>
+              <a:buClrTx/>
+              <a:buSzTx/>
+              <a:buFontTx/>
+              <a:buChar char="•"/>
+              <a:tabLst/>
             </a:pPr>
             <a:r>
-              <a:rPr lang="en-US" dirty="0">
+              <a:rPr kumimoji="0" lang="en-US" altLang="en-US" sz="1800" b="1" i="0" u="none" strike="noStrike" cap="none" normalizeH="0" baseline="0" dirty="0">
+                <a:ln>
+                  <a:noFill/>
+                </a:ln>
                 <a:solidFill>
                   <a:schemeClr val="tx1"/>
                 </a:solidFill>
-                <a:latin typeface="Times New Roman" panose="02020603050405020304" pitchFamily="18" charset="0"/>
-                <a:cs typeface="Times New Roman" panose="02020603050405020304" pitchFamily="18" charset="0"/>
+                <a:effectLst/>
+                <a:latin typeface="Arial" panose="020B0604020202020204" pitchFamily="34" charset="0"/>
               </a:rPr>
-              <a:t>Naive Bayes is a probabilistic machine learning algorithm based on Bayes’ Theorem.</a:t>
+              <a:t>Programming:</a:t>
+            </a:r>
+            <a:r>
+              <a:rPr kumimoji="0" lang="en-US" altLang="en-US" sz="1800" b="0" i="0" u="none" strike="noStrike" cap="none" normalizeH="0" baseline="0" dirty="0">
+                <a:ln>
+                  <a:noFill/>
+                </a:ln>
+                <a:solidFill>
+                  <a:schemeClr val="tx1"/>
+                </a:solidFill>
+                <a:effectLst/>
+                <a:latin typeface="Arial" panose="020B0604020202020204" pitchFamily="34" charset="0"/>
+              </a:rPr>
+              <a:t> Java ,Python ,C++</a:t>
             </a:r>
           </a:p>
           <a:p>
-            <a:pPr marL="114300" indent="0">
-              <a:buNone/>
+            <a:pPr marL="0" lvl="0" indent="0" eaLnBrk="0" fontAlgn="base" hangingPunct="0">
+              <a:lnSpc>
+                <a:spcPct val="100000"/>
+              </a:lnSpc>
+              <a:spcBef>
+                <a:spcPct val="0"/>
+              </a:spcBef>
+              <a:spcAft>
+                <a:spcPct val="0"/>
+              </a:spcAft>
+              <a:buClrTx/>
+              <a:buSzTx/>
+              <a:buFontTx/>
+              <a:buChar char="•"/>
             </a:pPr>
             <a:r>
-              <a:rPr lang="en-US" dirty="0">
+              <a:rPr kumimoji="0" lang="en-US" altLang="en-US" sz="1800" b="1" i="0" u="none" strike="noStrike" cap="none" normalizeH="0" baseline="0" dirty="0">
+                <a:ln>
+                  <a:noFill/>
+                </a:ln>
                 <a:solidFill>
                   <a:schemeClr val="tx1"/>
                 </a:solidFill>
-                <a:latin typeface="Times New Roman" panose="02020603050405020304" pitchFamily="18" charset="0"/>
-                <a:cs typeface="Times New Roman" panose="02020603050405020304" pitchFamily="18" charset="0"/>
+                <a:effectLst/>
+                <a:latin typeface="Arial" panose="020B0604020202020204" pitchFamily="34" charset="0"/>
               </a:rPr>
-              <a:t>It predicts the most likely disease by calculating the probability of each disease given the observed symptoms and patient information.</a:t>
+              <a:t>Database:</a:t>
             </a:r>
-          </a:p>
-          <a:p>
-            <a:pPr marL="114300" indent="0">
-              <a:buNone/>
-            </a:pPr>
-            <a:endParaRPr lang="en-US" dirty="0">
-              <a:solidFill>
-                <a:schemeClr val="tx1"/>
-              </a:solidFill>
-              <a:latin typeface="Times New Roman" panose="02020603050405020304" pitchFamily="18" charset="0"/>
-              <a:cs typeface="Times New Roman" panose="02020603050405020304" pitchFamily="18" charset="0"/>
-            </a:endParaRPr>
-          </a:p>
-          <a:p>
-            <a:pPr marL="114300" indent="0">
-              <a:buNone/>
-            </a:pPr>
             <a:r>
-              <a:rPr lang="en-US" b="1" dirty="0">
+              <a:rPr kumimoji="0" lang="en-US" altLang="en-US" sz="1800" b="0" i="0" u="none" strike="noStrike" cap="none" normalizeH="0" baseline="0" dirty="0">
+                <a:ln>
+                  <a:noFill/>
+                </a:ln>
                 <a:solidFill>
                   <a:schemeClr val="tx1"/>
                 </a:solidFill>
-                <a:latin typeface="Times New Roman" panose="02020603050405020304" pitchFamily="18" charset="0"/>
-                <a:cs typeface="Times New Roman" panose="02020603050405020304" pitchFamily="18" charset="0"/>
+                <a:effectLst/>
+                <a:latin typeface="Arial" panose="020B0604020202020204" pitchFamily="34" charset="0"/>
               </a:rPr>
-              <a:t> Working Principle</a:t>
-            </a:r>
-          </a:p>
-          <a:p>
-            <a:pPr marL="114300" indent="0">
-              <a:buNone/>
-            </a:pPr>
-            <a:r>
-              <a:rPr lang="en-US" dirty="0">
-                <a:solidFill>
-                  <a:schemeClr val="tx1"/>
-                </a:solidFill>
-                <a:latin typeface="Times New Roman" panose="02020603050405020304" pitchFamily="18" charset="0"/>
-                <a:cs typeface="Times New Roman" panose="02020603050405020304" pitchFamily="18" charset="0"/>
-              </a:rPr>
-              <a:t>Assumes that symptoms are conditionally independent of each other given the disease.</a:t>
-            </a:r>
-          </a:p>
-          <a:p>
-            <a:pPr marL="114300" indent="0">
-              <a:buNone/>
-            </a:pPr>
-            <a:r>
-              <a:rPr lang="en-US" dirty="0">
-                <a:solidFill>
-                  <a:schemeClr val="tx1"/>
-                </a:solidFill>
-                <a:latin typeface="Times New Roman" panose="02020603050405020304" pitchFamily="18" charset="0"/>
-                <a:cs typeface="Times New Roman" panose="02020603050405020304" pitchFamily="18" charset="0"/>
-              </a:rPr>
-              <a:t>Computes disease probabilities using frequency of symptoms from the training dataset.</a:t>
-            </a:r>
-          </a:p>
-          <a:p>
-            <a:pPr marL="114300" indent="0">
-              <a:buNone/>
-            </a:pPr>
-            <a:endParaRPr lang="en-US" dirty="0">
-              <a:solidFill>
-                <a:schemeClr val="tx1"/>
-              </a:solidFill>
-              <a:latin typeface="Times New Roman" panose="02020603050405020304" pitchFamily="18" charset="0"/>
-              <a:cs typeface="Times New Roman" panose="02020603050405020304" pitchFamily="18" charset="0"/>
-            </a:endParaRPr>
-          </a:p>
-          <a:p>
-            <a:pPr marL="114300" indent="0">
-              <a:buNone/>
-            </a:pPr>
-            <a:r>
-              <a:rPr lang="en-US" b="1" dirty="0">
-                <a:solidFill>
-                  <a:schemeClr val="tx1"/>
-                </a:solidFill>
-                <a:latin typeface="Times New Roman" panose="02020603050405020304" pitchFamily="18" charset="0"/>
-                <a:cs typeface="Times New Roman" panose="02020603050405020304" pitchFamily="18" charset="0"/>
-              </a:rPr>
-              <a:t>Justification</a:t>
-            </a:r>
-            <a:br>
-              <a:rPr lang="en-US" dirty="0">
-                <a:solidFill>
-                  <a:schemeClr val="tx1"/>
-                </a:solidFill>
-                <a:latin typeface="Times New Roman" panose="02020603050405020304" pitchFamily="18" charset="0"/>
-                <a:cs typeface="Times New Roman" panose="02020603050405020304" pitchFamily="18" charset="0"/>
-              </a:rPr>
-            </a:br>
-            <a:r>
-              <a:rPr lang="en-US" dirty="0">
-                <a:solidFill>
-                  <a:schemeClr val="tx1"/>
-                </a:solidFill>
-                <a:latin typeface="Times New Roman" panose="02020603050405020304" pitchFamily="18" charset="0"/>
-                <a:cs typeface="Times New Roman" panose="02020603050405020304" pitchFamily="18" charset="0"/>
-              </a:rPr>
-              <a:t>Works well with text data such as medical symptoms represented using bag-of-words.</a:t>
-            </a:r>
-            <a:br>
-              <a:rPr lang="en-US" dirty="0">
-                <a:solidFill>
-                  <a:schemeClr val="tx1"/>
-                </a:solidFill>
-                <a:latin typeface="Times New Roman" panose="02020603050405020304" pitchFamily="18" charset="0"/>
-                <a:cs typeface="Times New Roman" panose="02020603050405020304" pitchFamily="18" charset="0"/>
-              </a:rPr>
-            </a:br>
-            <a:r>
-              <a:rPr lang="en-US" dirty="0">
-                <a:solidFill>
-                  <a:schemeClr val="tx1"/>
-                </a:solidFill>
-                <a:latin typeface="Times New Roman" panose="02020603050405020304" pitchFamily="18" charset="0"/>
-                <a:cs typeface="Times New Roman" panose="02020603050405020304" pitchFamily="18" charset="0"/>
-              </a:rPr>
-              <a:t>Requires less computational power and provides quick predictions, suitable for real-time healthcare systems.</a:t>
+              <a:t> MySQL, MongoDB</a:t>
             </a:r>
           </a:p>
           <a:p>
@@ -8254,6 +5605,144 @@
               <a:buChar char="•"/>
               <a:tabLst/>
             </a:pPr>
+            <a:r>
+              <a:rPr kumimoji="0" lang="en-US" altLang="en-US" sz="1800" b="1" i="0" u="none" strike="noStrike" cap="none" normalizeH="0" baseline="0" dirty="0">
+                <a:ln>
+                  <a:noFill/>
+                </a:ln>
+                <a:solidFill>
+                  <a:schemeClr val="tx1"/>
+                </a:solidFill>
+                <a:effectLst/>
+                <a:latin typeface="Arial" panose="020B0604020202020204" pitchFamily="34" charset="0"/>
+              </a:rPr>
+              <a:t>Data Engineering:</a:t>
+            </a:r>
+            <a:r>
+              <a:rPr kumimoji="0" lang="en-US" altLang="en-US" sz="1800" b="0" i="0" u="none" strike="noStrike" cap="none" normalizeH="0" baseline="0" dirty="0">
+                <a:ln>
+                  <a:noFill/>
+                </a:ln>
+                <a:solidFill>
+                  <a:schemeClr val="tx1"/>
+                </a:solidFill>
+                <a:effectLst/>
+                <a:latin typeface="Arial" panose="020B0604020202020204" pitchFamily="34" charset="0"/>
+              </a:rPr>
+              <a:t> ETL pipeline </a:t>
+            </a:r>
+            <a:endParaRPr lang="en-US" altLang="en-US" sz="1800" dirty="0">
+              <a:solidFill>
+                <a:schemeClr val="tx1"/>
+              </a:solidFill>
+              <a:latin typeface="Arial" panose="020B0604020202020204" pitchFamily="34" charset="0"/>
+            </a:endParaRPr>
+          </a:p>
+          <a:p>
+            <a:pPr marL="0" marR="0" lvl="0" indent="0" algn="l" defTabSz="914400" rtl="0" eaLnBrk="0" fontAlgn="base" latinLnBrk="0" hangingPunct="0">
+              <a:lnSpc>
+                <a:spcPct val="100000"/>
+              </a:lnSpc>
+              <a:spcBef>
+                <a:spcPct val="0"/>
+              </a:spcBef>
+              <a:spcAft>
+                <a:spcPct val="0"/>
+              </a:spcAft>
+              <a:buClrTx/>
+              <a:buSzTx/>
+              <a:buFontTx/>
+              <a:buChar char="•"/>
+              <a:tabLst/>
+            </a:pPr>
+            <a:r>
+              <a:rPr kumimoji="0" lang="en-US" altLang="en-US" sz="1800" b="1" i="0" u="none" strike="noStrike" cap="none" normalizeH="0" baseline="0" dirty="0">
+                <a:ln>
+                  <a:noFill/>
+                </a:ln>
+                <a:solidFill>
+                  <a:schemeClr val="tx1"/>
+                </a:solidFill>
+                <a:effectLst/>
+                <a:latin typeface="Arial" panose="020B0604020202020204" pitchFamily="34" charset="0"/>
+              </a:rPr>
+              <a:t>Data Analytics:</a:t>
+            </a:r>
+            <a:r>
+              <a:rPr kumimoji="0" lang="en-US" altLang="en-US" sz="1800" b="0" i="0" u="none" strike="noStrike" cap="none" normalizeH="0" baseline="0" dirty="0">
+                <a:ln>
+                  <a:noFill/>
+                </a:ln>
+                <a:solidFill>
+                  <a:schemeClr val="tx1"/>
+                </a:solidFill>
+                <a:effectLst/>
+                <a:latin typeface="Arial" panose="020B0604020202020204" pitchFamily="34" charset="0"/>
+              </a:rPr>
+              <a:t> </a:t>
+            </a:r>
+            <a:r>
+              <a:rPr lang="en-US" altLang="en-US" sz="1800" dirty="0">
+                <a:solidFill>
+                  <a:schemeClr val="tx1"/>
+                </a:solidFill>
+                <a:latin typeface="Arial" panose="020B0604020202020204" pitchFamily="34" charset="0"/>
+              </a:rPr>
+              <a:t>Power BI, Tableau</a:t>
+            </a:r>
+          </a:p>
+          <a:p>
+            <a:pPr marL="0" marR="0" lvl="0" indent="0" algn="l" defTabSz="914400" rtl="0" eaLnBrk="0" fontAlgn="base" latinLnBrk="0" hangingPunct="0">
+              <a:lnSpc>
+                <a:spcPct val="100000"/>
+              </a:lnSpc>
+              <a:spcBef>
+                <a:spcPct val="0"/>
+              </a:spcBef>
+              <a:spcAft>
+                <a:spcPct val="0"/>
+              </a:spcAft>
+              <a:buClrTx/>
+              <a:buSzTx/>
+              <a:buFontTx/>
+              <a:buChar char="•"/>
+              <a:tabLst/>
+            </a:pPr>
+            <a:r>
+              <a:rPr kumimoji="0" lang="en-US" altLang="en-US" sz="1800" b="1" i="0" u="none" strike="noStrike" cap="none" normalizeH="0" baseline="0" dirty="0">
+                <a:ln>
+                  <a:noFill/>
+                </a:ln>
+                <a:solidFill>
+                  <a:schemeClr val="tx1"/>
+                </a:solidFill>
+                <a:effectLst/>
+                <a:latin typeface="Arial" panose="020B0604020202020204" pitchFamily="34" charset="0"/>
+              </a:rPr>
+              <a:t>Web &amp; Backend:</a:t>
+            </a:r>
+            <a:r>
+              <a:rPr kumimoji="0" lang="en-US" altLang="en-US" sz="1800" b="0" i="0" u="none" strike="noStrike" cap="none" normalizeH="0" baseline="0" dirty="0">
+                <a:ln>
+                  <a:noFill/>
+                </a:ln>
+                <a:solidFill>
+                  <a:schemeClr val="tx1"/>
+                </a:solidFill>
+                <a:effectLst/>
+                <a:latin typeface="Arial" panose="020B0604020202020204" pitchFamily="34" charset="0"/>
+              </a:rPr>
+              <a:t> React JS ,</a:t>
+            </a:r>
+            <a:r>
+              <a:rPr lang="en-US" altLang="en-US" sz="1800" dirty="0">
+                <a:solidFill>
+                  <a:schemeClr val="tx1"/>
+                </a:solidFill>
+                <a:latin typeface="Arial" panose="020B0604020202020204" pitchFamily="34" charset="0"/>
+              </a:rPr>
+              <a:t>Node JS, Express JS</a:t>
+            </a:r>
             <a:endParaRPr kumimoji="0" lang="en-US" altLang="en-US" sz="1800" b="0" i="0" u="none" strike="noStrike" cap="none" normalizeH="0" baseline="0" dirty="0">
               <a:ln>
                 <a:noFill/>
@@ -8262,304 +5751,189 @@
                 <a:schemeClr val="tx1"/>
               </a:solidFill>
               <a:effectLst/>
+              <a:latin typeface="Arial" panose="020B0604020202020204" pitchFamily="34" charset="0"/>
+            </a:endParaRPr>
+          </a:p>
+          <a:p>
+            <a:pPr marL="0" marR="0" lvl="0" indent="0" algn="l" defTabSz="914400" rtl="0" eaLnBrk="0" fontAlgn="base" latinLnBrk="0" hangingPunct="0">
+              <a:lnSpc>
+                <a:spcPct val="100000"/>
+              </a:lnSpc>
+              <a:spcBef>
+                <a:spcPct val="0"/>
+              </a:spcBef>
+              <a:spcAft>
+                <a:spcPct val="0"/>
+              </a:spcAft>
+              <a:buClrTx/>
+              <a:buSzTx/>
+              <a:buFontTx/>
+              <a:buChar char="•"/>
+              <a:tabLst/>
+            </a:pPr>
+            <a:r>
+              <a:rPr kumimoji="0" lang="en-US" altLang="en-US" sz="1800" b="1" i="0" u="none" strike="noStrike" cap="none" normalizeH="0" baseline="0" dirty="0">
+                <a:ln>
+                  <a:noFill/>
+                </a:ln>
+                <a:solidFill>
+                  <a:schemeClr val="tx1"/>
+                </a:solidFill>
+                <a:effectLst/>
+                <a:latin typeface="Arial" panose="020B0604020202020204" pitchFamily="34" charset="0"/>
+              </a:rPr>
+              <a:t>Tools:</a:t>
+            </a:r>
+            <a:r>
+              <a:rPr kumimoji="0" lang="en-US" altLang="en-US" sz="1800" b="0" i="0" u="none" strike="noStrike" cap="none" normalizeH="0" baseline="0" dirty="0">
+                <a:ln>
+                  <a:noFill/>
+                </a:ln>
+                <a:solidFill>
+                  <a:schemeClr val="tx1"/>
+                </a:solidFill>
+                <a:effectLst/>
+                <a:latin typeface="Arial" panose="020B0604020202020204" pitchFamily="34" charset="0"/>
+              </a:rPr>
+              <a:t> Git, GitHub</a:t>
+            </a:r>
+          </a:p>
+        </p:txBody>
+      </p:sp>
+      <p:sp>
+        <p:nvSpPr>
+          <p:cNvPr id="7" name="TextBox 6">
+            <a:extLst>
+              <a:ext uri="{FF2B5EF4-FFF2-40B4-BE49-F238E27FC236}">
+                <a16:creationId xmlns:a16="http://schemas.microsoft.com/office/drawing/2014/main" id="{24D1F8B7-1F6C-473E-692F-7D13718F9B07}"/>
+              </a:ext>
+            </a:extLst>
+          </p:cNvPr>
+          <p:cNvSpPr txBox="1"/>
+          <p:nvPr/>
+        </p:nvSpPr>
+        <p:spPr>
+          <a:xfrm>
+            <a:off x="400910" y="4498420"/>
+            <a:ext cx="3427675" cy="400110"/>
+          </a:xfrm>
+          <a:prstGeom prst="rect">
+            <a:avLst/>
+          </a:prstGeom>
+          <a:noFill/>
+        </p:spPr>
+        <p:txBody>
+          <a:bodyPr wrap="square" rtlCol="0">
+            <a:spAutoFit/>
+          </a:bodyPr>
+          <a:lstStyle/>
+          <a:p>
+            <a:r>
+              <a:rPr lang="en-US" sz="2000" b="1" dirty="0">
+                <a:latin typeface="Times New Roman" panose="02020603050405020304" pitchFamily="18" charset="0"/>
+                <a:cs typeface="Times New Roman" panose="02020603050405020304" pitchFamily="18" charset="0"/>
+              </a:rPr>
+              <a:t>Expected Salary: 10-12LPA</a:t>
+            </a:r>
+            <a:endParaRPr lang="en-IN" sz="2000" b="1" dirty="0">
               <a:latin typeface="Times New Roman" panose="02020603050405020304" pitchFamily="18" charset="0"/>
               <a:cs typeface="Times New Roman" panose="02020603050405020304" pitchFamily="18" charset="0"/>
             </a:endParaRPr>
           </a:p>
         </p:txBody>
       </p:sp>
-    </p:spTree>
-    <p:extLst>
-      <p:ext uri="{BB962C8B-B14F-4D97-AF65-F5344CB8AC3E}">
-        <p14:creationId xmlns:p14="http://schemas.microsoft.com/office/powerpoint/2010/main" val="3466395524"/>
-      </p:ext>
-    </p:extLst>
-  </p:cSld>
-  <p:clrMapOvr>
-    <a:masterClrMapping/>
-  </p:clrMapOvr>
-</p:sld>
-</file>
-
-<file path=ppt/slides/slide8.xml><?xml version="1.0" encoding="utf-8"?>
-<p:sld xmlns:a="http://schemas.openxmlformats.org/drawingml/2006/main" xmlns:r="http://schemas.openxmlformats.org/officeDocument/2006/relationships" xmlns:p="http://schemas.openxmlformats.org/presentationml/2006/main">
-  <p:cSld>
-    <p:spTree>
-      <p:nvGrpSpPr>
-        <p:cNvPr id="1" name=""/>
-        <p:cNvGrpSpPr/>
-        <p:nvPr/>
-      </p:nvGrpSpPr>
-      <p:grpSpPr>
-        <a:xfrm>
-          <a:off x="0" y="0"/>
-          <a:ext cx="0" cy="0"/>
-          <a:chOff x="0" y="0"/>
-          <a:chExt cx="0" cy="0"/>
-        </a:xfrm>
-      </p:grpSpPr>
       <p:sp>
         <p:nvSpPr>
-          <p:cNvPr id="2" name="Title 1">
+          <p:cNvPr id="9" name="TextBox 8">
             <a:extLst>
               <a:ext uri="{FF2B5EF4-FFF2-40B4-BE49-F238E27FC236}">
-                <a16:creationId xmlns:a16="http://schemas.microsoft.com/office/drawing/2014/main" id="{4246FA40-EF58-F562-4CD0-AC2041A08BF7}"/>
+                <a16:creationId xmlns:a16="http://schemas.microsoft.com/office/drawing/2014/main" id="{056542F1-ADF6-4C92-35B0-269BC4BAB3EE}"/>
               </a:ext>
             </a:extLst>
           </p:cNvPr>
-          <p:cNvSpPr>
-            <a:spLocks noGrp="1"/>
-          </p:cNvSpPr>
-          <p:nvPr>
-            <p:ph type="title"/>
-          </p:nvPr>
+          <p:cNvSpPr txBox="1"/>
+          <p:nvPr/>
         </p:nvSpPr>
-        <p:spPr/>
+        <p:spPr>
+          <a:xfrm>
+            <a:off x="453484" y="2834411"/>
+            <a:ext cx="2267414" cy="400110"/>
+          </a:xfrm>
+          <a:prstGeom prst="rect">
+            <a:avLst/>
+          </a:prstGeom>
+          <a:noFill/>
+        </p:spPr>
         <p:txBody>
-          <a:bodyPr>
-            <a:normAutofit fontScale="90000"/>
+          <a:bodyPr wrap="square" rtlCol="0">
+            <a:spAutoFit/>
           </a:bodyPr>
           <a:lstStyle/>
           <a:p>
             <a:r>
-              <a:rPr lang="en-US" b="1" dirty="0">
+              <a:rPr lang="en-US" sz="2000" b="1" dirty="0">
                 <a:latin typeface="Times New Roman" panose="02020603050405020304" pitchFamily="18" charset="0"/>
                 <a:cs typeface="Times New Roman" panose="02020603050405020304" pitchFamily="18" charset="0"/>
               </a:rPr>
-              <a:t>50% Implementation Progress</a:t>
+              <a:t>Achievements:</a:t>
             </a:r>
+            <a:endParaRPr lang="en-IN" sz="2000" b="1" dirty="0">
+              <a:latin typeface="Times New Roman" panose="02020603050405020304" pitchFamily="18" charset="0"/>
+              <a:cs typeface="Times New Roman" panose="02020603050405020304" pitchFamily="18" charset="0"/>
+            </a:endParaRPr>
+          </a:p>
+        </p:txBody>
+      </p:sp>
+      <p:sp>
+        <p:nvSpPr>
+          <p:cNvPr id="10" name="TextBox 9">
+            <a:extLst>
+              <a:ext uri="{FF2B5EF4-FFF2-40B4-BE49-F238E27FC236}">
+                <a16:creationId xmlns:a16="http://schemas.microsoft.com/office/drawing/2014/main" id="{7FD73B70-BD15-C78A-7A2F-21C51A6A8E6A}"/>
+              </a:ext>
+            </a:extLst>
+          </p:cNvPr>
+          <p:cNvSpPr txBox="1"/>
+          <p:nvPr/>
+        </p:nvSpPr>
+        <p:spPr>
+          <a:xfrm>
+            <a:off x="1988366" y="3712582"/>
+            <a:ext cx="4858481" cy="307777"/>
+          </a:xfrm>
+          <a:prstGeom prst="rect">
+            <a:avLst/>
+          </a:prstGeom>
+          <a:noFill/>
+        </p:spPr>
+        <p:txBody>
+          <a:bodyPr wrap="square" rtlCol="0">
+            <a:spAutoFit/>
+          </a:bodyPr>
+          <a:lstStyle/>
+          <a:p>
             <a:endParaRPr lang="en-IN" dirty="0"/>
           </a:p>
         </p:txBody>
       </p:sp>
       <p:sp>
         <p:nvSpPr>
-          <p:cNvPr id="3" name="Text Placeholder 2">
+          <p:cNvPr id="12" name="Rectangle 3">
             <a:extLst>
               <a:ext uri="{FF2B5EF4-FFF2-40B4-BE49-F238E27FC236}">
-                <a16:creationId xmlns:a16="http://schemas.microsoft.com/office/drawing/2014/main" id="{9ABAE34D-3AE6-C67F-50E3-70192C56A802}"/>
+                <a16:creationId xmlns:a16="http://schemas.microsoft.com/office/drawing/2014/main" id="{00BD8C68-32F5-CD3C-7634-A96AD39D4CC8}"/>
               </a:ext>
             </a:extLst>
           </p:cNvPr>
           <p:cNvSpPr>
-            <a:spLocks noGrp="1"/>
+            <a:spLocks noChangeArrowheads="1"/>
           </p:cNvSpPr>
-          <p:nvPr>
-            <p:ph type="body" idx="1"/>
-          </p:nvPr>
-        </p:nvSpPr>
-        <p:spPr/>
-        <p:txBody>
-          <a:bodyPr>
-            <a:noAutofit/>
-          </a:bodyPr>
-          <a:lstStyle/>
-          <a:p>
-            <a:pPr marL="114300" indent="0">
-              <a:buNone/>
-            </a:pPr>
-            <a:r>
-              <a:rPr lang="en-US" sz="1600" b="1" dirty="0">
-                <a:solidFill>
-                  <a:schemeClr val="tx1"/>
-                </a:solidFill>
-                <a:latin typeface="Times New Roman" panose="02020603050405020304" pitchFamily="18" charset="0"/>
-                <a:cs typeface="Times New Roman" panose="02020603050405020304" pitchFamily="18" charset="0"/>
-              </a:rPr>
-              <a:t>Completed Tasks:</a:t>
-            </a:r>
-          </a:p>
-          <a:p>
-            <a:r>
-              <a:rPr lang="en-US" sz="1600" dirty="0">
-                <a:solidFill>
-                  <a:schemeClr val="tx1"/>
-                </a:solidFill>
-                <a:latin typeface="Times New Roman" panose="02020603050405020304" pitchFamily="18" charset="0"/>
-                <a:cs typeface="Times New Roman" panose="02020603050405020304" pitchFamily="18" charset="0"/>
-              </a:rPr>
-              <a:t>Collected and preprocessed the healthcare symptoms–disease dataset by cleaning symptom text and structuring patient data.</a:t>
-            </a:r>
-          </a:p>
-          <a:p>
-            <a:r>
-              <a:rPr lang="en-US" sz="1600" dirty="0">
-                <a:solidFill>
-                  <a:schemeClr val="tx1"/>
-                </a:solidFill>
-                <a:latin typeface="Times New Roman" panose="02020603050405020304" pitchFamily="18" charset="0"/>
-                <a:cs typeface="Times New Roman" panose="02020603050405020304" pitchFamily="18" charset="0"/>
-              </a:rPr>
-              <a:t>Designed and implemented the backend workflow including data preprocessing, feature extraction, and Naive Bayes model training.</a:t>
-            </a:r>
-          </a:p>
-          <a:p>
-            <a:pPr marL="114300" indent="0">
-              <a:buNone/>
-            </a:pPr>
-            <a:r>
-              <a:rPr lang="en-US" sz="1600" b="1" dirty="0">
-                <a:solidFill>
-                  <a:schemeClr val="tx1"/>
-                </a:solidFill>
-                <a:latin typeface="Times New Roman" panose="02020603050405020304" pitchFamily="18" charset="0"/>
-                <a:cs typeface="Times New Roman" panose="02020603050405020304" pitchFamily="18" charset="0"/>
-              </a:rPr>
-              <a:t>System Development Status:</a:t>
-            </a:r>
-          </a:p>
-          <a:p>
-            <a:r>
-              <a:rPr lang="en-US" sz="1600" dirty="0">
-                <a:solidFill>
-                  <a:schemeClr val="tx1"/>
-                </a:solidFill>
-                <a:latin typeface="Times New Roman" panose="02020603050405020304" pitchFamily="18" charset="0"/>
-                <a:cs typeface="Times New Roman" panose="02020603050405020304" pitchFamily="18" charset="0"/>
-              </a:rPr>
-              <a:t>Machine learning model is successfully integrated with the backend for disease probability prediction.</a:t>
-            </a:r>
-          </a:p>
-          <a:p>
-            <a:r>
-              <a:rPr lang="en-US" sz="1600" dirty="0">
-                <a:solidFill>
-                  <a:schemeClr val="tx1"/>
-                </a:solidFill>
-                <a:latin typeface="Times New Roman" panose="02020603050405020304" pitchFamily="18" charset="0"/>
-                <a:cs typeface="Times New Roman" panose="02020603050405020304" pitchFamily="18" charset="0"/>
-              </a:rPr>
-              <a:t>Basic web-based user interface is developed to accept patient inputs and display prediction results.</a:t>
-            </a:r>
-          </a:p>
-          <a:p>
-            <a:pPr marL="114300" indent="0">
-              <a:buNone/>
-            </a:pPr>
-            <a:r>
-              <a:rPr lang="en-US" sz="1600" b="1" dirty="0">
-                <a:solidFill>
-                  <a:schemeClr val="tx1"/>
-                </a:solidFill>
-                <a:latin typeface="Times New Roman" panose="02020603050405020304" pitchFamily="18" charset="0"/>
-                <a:cs typeface="Times New Roman" panose="02020603050405020304" pitchFamily="18" charset="0"/>
-              </a:rPr>
-              <a:t>Current Output:</a:t>
-            </a:r>
-          </a:p>
-          <a:p>
-            <a:pPr marL="114300" indent="0">
-              <a:buNone/>
-            </a:pPr>
-            <a:r>
-              <a:rPr lang="en-US" sz="1600" dirty="0">
-                <a:solidFill>
-                  <a:schemeClr val="tx1"/>
-                </a:solidFill>
-                <a:latin typeface="Times New Roman" panose="02020603050405020304" pitchFamily="18" charset="0"/>
-                <a:cs typeface="Times New Roman" panose="02020603050405020304" pitchFamily="18" charset="0"/>
-              </a:rPr>
-              <a:t>      System predicts top three possible diseases with probability-based risk levels (High / Medium / Low).</a:t>
-            </a:r>
-          </a:p>
-          <a:p>
-            <a:pPr marL="114300" indent="0">
-              <a:buNone/>
-            </a:pPr>
-            <a:endParaRPr lang="en-IN" sz="1600" dirty="0">
-              <a:solidFill>
-                <a:schemeClr val="tx1"/>
-              </a:solidFill>
-              <a:latin typeface="Times New Roman" panose="02020603050405020304" pitchFamily="18" charset="0"/>
-              <a:cs typeface="Times New Roman" panose="02020603050405020304" pitchFamily="18" charset="0"/>
-            </a:endParaRPr>
-          </a:p>
-        </p:txBody>
-      </p:sp>
-    </p:spTree>
-    <p:extLst>
-      <p:ext uri="{BB962C8B-B14F-4D97-AF65-F5344CB8AC3E}">
-        <p14:creationId xmlns:p14="http://schemas.microsoft.com/office/powerpoint/2010/main" val="2865695538"/>
-      </p:ext>
-    </p:extLst>
-  </p:cSld>
-  <p:clrMapOvr>
-    <a:masterClrMapping/>
-  </p:clrMapOvr>
-</p:sld>
-</file>
-
-<file path=ppt/slides/slide9.xml><?xml version="1.0" encoding="utf-8"?>
-<p:sld xmlns:a="http://schemas.openxmlformats.org/drawingml/2006/main" xmlns:r="http://schemas.openxmlformats.org/officeDocument/2006/relationships" xmlns:p="http://schemas.openxmlformats.org/presentationml/2006/main">
-  <p:cSld>
-    <p:spTree>
-      <p:nvGrpSpPr>
-        <p:cNvPr id="1" name=""/>
-        <p:cNvGrpSpPr/>
-        <p:nvPr/>
-      </p:nvGrpSpPr>
-      <p:grpSpPr>
-        <a:xfrm>
-          <a:off x="0" y="0"/>
-          <a:ext cx="0" cy="0"/>
-          <a:chOff x="0" y="0"/>
-          <a:chExt cx="0" cy="0"/>
-        </a:xfrm>
-      </p:grpSpPr>
-      <p:sp>
-        <p:nvSpPr>
-          <p:cNvPr id="2" name="Title 1">
-            <a:extLst>
-              <a:ext uri="{FF2B5EF4-FFF2-40B4-BE49-F238E27FC236}">
-                <a16:creationId xmlns:a16="http://schemas.microsoft.com/office/drawing/2014/main" id="{AB208E5A-3085-CEAD-264D-8FDED098CF51}"/>
-              </a:ext>
-            </a:extLst>
-          </p:cNvPr>
-          <p:cNvSpPr>
-            <a:spLocks noGrp="1"/>
-          </p:cNvSpPr>
-          <p:nvPr>
-            <p:ph type="title"/>
-          </p:nvPr>
-        </p:nvSpPr>
-        <p:spPr/>
-        <p:txBody>
-          <a:bodyPr>
-            <a:normAutofit fontScale="90000"/>
-          </a:bodyPr>
-          <a:lstStyle/>
-          <a:p>
-            <a:r>
-              <a:rPr lang="en-US" b="1" dirty="0">
-                <a:latin typeface="Times New Roman" panose="02020603050405020304" pitchFamily="18" charset="0"/>
-                <a:cs typeface="Times New Roman" panose="02020603050405020304" pitchFamily="18" charset="0"/>
-              </a:rPr>
-              <a:t>Planned Remaining Work</a:t>
-            </a:r>
-            <a:endParaRPr lang="en-IN" dirty="0"/>
-          </a:p>
-        </p:txBody>
-      </p:sp>
-      <p:sp>
-        <p:nvSpPr>
-          <p:cNvPr id="4" name="Rectangle 1">
-            <a:extLst>
-              <a:ext uri="{FF2B5EF4-FFF2-40B4-BE49-F238E27FC236}">
-                <a16:creationId xmlns:a16="http://schemas.microsoft.com/office/drawing/2014/main" id="{CB4BE27B-C5B5-1CB4-27F7-46A1B4169EC0}"/>
-              </a:ext>
-            </a:extLst>
-          </p:cNvPr>
-          <p:cNvSpPr>
-            <a:spLocks noGrp="1" noChangeArrowheads="1"/>
-          </p:cNvSpPr>
-          <p:nvPr>
-            <p:ph type="body" idx="1"/>
-          </p:nvPr>
+          <p:nvPr/>
         </p:nvSpPr>
         <p:spPr bwMode="auto">
           <a:xfrm>
-            <a:off x="311700" y="1238542"/>
-            <a:ext cx="8249370" cy="3170099"/>
+            <a:off x="0" y="-184666"/>
+            <a:ext cx="264816" cy="369332"/>
           </a:xfrm>
           <a:prstGeom prst="rect">
             <a:avLst/>
@@ -8599,7 +5973,7 @@
           </a:extLst>
         </p:spPr>
         <p:txBody>
-          <a:bodyPr vert="horz" wrap="square" lIns="91440" tIns="45720" rIns="91440" bIns="45720" numCol="1" anchor="ctr" anchorCtr="0" compatLnSpc="1">
+          <a:bodyPr vert="horz" wrap="none" lIns="91440" tIns="45720" rIns="91440" bIns="45720" numCol="1" anchor="ctr" anchorCtr="0" compatLnSpc="1">
             <a:prstTxWarp prst="textNoShape">
               <a:avLst/>
             </a:prstTxWarp>
@@ -8607,7 +5981,7 @@
           </a:bodyPr>
           <a:lstStyle/>
           <a:p>
-            <a:pPr marL="0" marR="0" lvl="0" indent="0" algn="just" defTabSz="914400" rtl="0" eaLnBrk="0" fontAlgn="base" latinLnBrk="0" hangingPunct="0">
+            <a:pPr marL="0" marR="0" lvl="0" indent="0" algn="l" defTabSz="914400" rtl="0" eaLnBrk="0" fontAlgn="base" latinLnBrk="0" hangingPunct="0">
               <a:lnSpc>
                 <a:spcPct val="100000"/>
               </a:lnSpc>
@@ -8623,22 +5997,111 @@
               <a:buChar char="•"/>
               <a:tabLst/>
             </a:pPr>
+            <a:endParaRPr kumimoji="0" lang="en-US" altLang="en-US" sz="1800" b="0" i="0" u="none" strike="noStrike" cap="none" normalizeH="0" baseline="0" dirty="0">
+              <a:ln>
+                <a:noFill/>
+              </a:ln>
+              <a:solidFill>
+                <a:schemeClr val="tx1"/>
+              </a:solidFill>
+              <a:effectLst/>
+              <a:latin typeface="Arial" panose="020B0604020202020204" pitchFamily="34" charset="0"/>
+            </a:endParaRPr>
+          </a:p>
+        </p:txBody>
+      </p:sp>
+      <p:sp>
+        <p:nvSpPr>
+          <p:cNvPr id="14" name="TextBox 13">
+            <a:extLst>
+              <a:ext uri="{FF2B5EF4-FFF2-40B4-BE49-F238E27FC236}">
+                <a16:creationId xmlns:a16="http://schemas.microsoft.com/office/drawing/2014/main" id="{DC607C74-12EE-8996-CE7F-A9C7D1A0A48C}"/>
+              </a:ext>
+            </a:extLst>
+          </p:cNvPr>
+          <p:cNvSpPr txBox="1"/>
+          <p:nvPr/>
+        </p:nvSpPr>
+        <p:spPr>
+          <a:xfrm>
+            <a:off x="817756" y="3234521"/>
+            <a:ext cx="7790985" cy="1169551"/>
+          </a:xfrm>
+          <a:prstGeom prst="rect">
+            <a:avLst/>
+          </a:prstGeom>
+          <a:noFill/>
+        </p:spPr>
+        <p:txBody>
+          <a:bodyPr wrap="square">
+            <a:spAutoFit/>
+          </a:bodyPr>
+          <a:lstStyle/>
+          <a:p>
+            <a:pPr lvl="0" eaLnBrk="0" fontAlgn="base" hangingPunct="0">
+              <a:spcBef>
+                <a:spcPct val="0"/>
+              </a:spcBef>
+              <a:spcAft>
+                <a:spcPct val="0"/>
+              </a:spcAft>
+              <a:buClrTx/>
+              <a:buFontTx/>
+              <a:buChar char="•"/>
+            </a:pPr>
             <a:r>
-              <a:rPr kumimoji="0" lang="en-US" altLang="en-US" sz="2000" b="0" i="0" u="none" strike="noStrike" cap="none" normalizeH="0" baseline="0" dirty="0">
-                <a:ln>
-                  <a:noFill/>
-                </a:ln>
+              <a:rPr lang="en-US" dirty="0">
+                <a:latin typeface="Times New Roman" panose="02020603050405020304" pitchFamily="18" charset="0"/>
+                <a:cs typeface="Times New Roman" panose="02020603050405020304" pitchFamily="18" charset="0"/>
+              </a:rPr>
+              <a:t>Completed a Virtual Online Internship at Prodigy Infotech as a Data Science Intern.</a:t>
+            </a:r>
+          </a:p>
+          <a:p>
+            <a:pPr lvl="0" eaLnBrk="0" fontAlgn="base" hangingPunct="0">
+              <a:spcBef>
+                <a:spcPct val="0"/>
+              </a:spcBef>
+              <a:spcAft>
+                <a:spcPct val="0"/>
+              </a:spcAft>
+              <a:buClrTx/>
+              <a:buFontTx/>
+              <a:buChar char="•"/>
+            </a:pPr>
+            <a:r>
+              <a:rPr lang="en-US" altLang="en-US" dirty="0">
                 <a:solidFill>
                   <a:schemeClr val="tx1"/>
                 </a:solidFill>
-                <a:effectLst/>
-                <a:latin typeface="Arial" panose="020B0604020202020204" pitchFamily="34" charset="0"/>
+                <a:latin typeface="Times New Roman" panose="02020603050405020304" pitchFamily="18" charset="0"/>
+                <a:cs typeface="Times New Roman" panose="02020603050405020304" pitchFamily="18" charset="0"/>
               </a:rPr>
-              <a:t>Expand the healthcare dataset to include more patient records and disease variations.</a:t>
+              <a:t>Solved 2,173 problems on </a:t>
+            </a:r>
+            <a:r>
+              <a:rPr lang="en-US" altLang="en-US" dirty="0" err="1">
+                <a:solidFill>
+                  <a:schemeClr val="tx1"/>
+                </a:solidFill>
+                <a:latin typeface="Times New Roman" panose="02020603050405020304" pitchFamily="18" charset="0"/>
+                <a:cs typeface="Times New Roman" panose="02020603050405020304" pitchFamily="18" charset="0"/>
+              </a:rPr>
+              <a:t>Skillrack</a:t>
+            </a:r>
+            <a:r>
+              <a:rPr lang="en-US" altLang="en-US" dirty="0">
+                <a:solidFill>
+                  <a:schemeClr val="tx1"/>
+                </a:solidFill>
+                <a:latin typeface="Times New Roman" panose="02020603050405020304" pitchFamily="18" charset="0"/>
+                <a:cs typeface="Times New Roman" panose="02020603050405020304" pitchFamily="18" charset="0"/>
+              </a:rPr>
+              <a:t> and earned 1,293 medals.</a:t>
             </a:r>
           </a:p>
           <a:p>
-            <a:pPr marL="0" marR="0" lvl="0" indent="0" algn="just" defTabSz="914400" rtl="0" eaLnBrk="0" fontAlgn="base" latinLnBrk="0" hangingPunct="0">
+            <a:pPr marL="0" lvl="0" indent="0" eaLnBrk="0" fontAlgn="base" hangingPunct="0">
               <a:lnSpc>
                 <a:spcPct val="100000"/>
               </a:lnSpc>
@@ -8652,24 +6115,40 @@
               <a:buSzTx/>
               <a:buFontTx/>
               <a:buChar char="•"/>
-              <a:tabLst/>
             </a:pPr>
             <a:r>
-              <a:rPr kumimoji="0" lang="en-US" altLang="en-US" sz="2000" b="0" i="0" u="none" strike="noStrike" cap="none" normalizeH="0" baseline="0" dirty="0">
-                <a:ln>
-                  <a:noFill/>
-                </a:ln>
+              <a:rPr lang="en-US" altLang="en-US" dirty="0">
                 <a:solidFill>
                   <a:schemeClr val="tx1"/>
                 </a:solidFill>
-                <a:effectLst/>
-                <a:latin typeface="Arial" panose="020B0604020202020204" pitchFamily="34" charset="0"/>
+                <a:latin typeface="Times New Roman" panose="02020603050405020304" pitchFamily="18" charset="0"/>
+                <a:cs typeface="Times New Roman" panose="02020603050405020304" pitchFamily="18" charset="0"/>
               </a:rPr>
-              <a:t>Improve feature extraction techniques to enhance symptom–disease correlation.</a:t>
+              <a:t>Solved 350+ problems on </a:t>
+            </a:r>
+            <a:r>
+              <a:rPr lang="en-US" altLang="en-US" dirty="0" err="1">
+                <a:solidFill>
+                  <a:schemeClr val="tx1"/>
+                </a:solidFill>
+                <a:latin typeface="Times New Roman" panose="02020603050405020304" pitchFamily="18" charset="0"/>
+                <a:cs typeface="Times New Roman" panose="02020603050405020304" pitchFamily="18" charset="0"/>
+              </a:rPr>
+              <a:t>LeetCode</a:t>
+            </a:r>
+            <a:r>
+              <a:rPr lang="en-US" altLang="en-US" dirty="0">
+                <a:solidFill>
+                  <a:schemeClr val="tx1"/>
+                </a:solidFill>
+                <a:latin typeface="Times New Roman" panose="02020603050405020304" pitchFamily="18" charset="0"/>
+                <a:cs typeface="Times New Roman" panose="02020603050405020304" pitchFamily="18" charset="0"/>
+              </a:rPr>
+              <a:t> to strengthen problem-solving and data structure skills.</a:t>
             </a:r>
           </a:p>
           <a:p>
-            <a:pPr marL="0" marR="0" lvl="0" indent="0" algn="just" defTabSz="914400" rtl="0" eaLnBrk="0" fontAlgn="base" latinLnBrk="0" hangingPunct="0">
+            <a:pPr marL="0" lvl="0" indent="0" eaLnBrk="0" fontAlgn="base" hangingPunct="0">
               <a:lnSpc>
                 <a:spcPct val="100000"/>
               </a:lnSpc>
@@ -8683,24 +6162,20 @@
               <a:buSzTx/>
               <a:buFontTx/>
               <a:buChar char="•"/>
-              <a:tabLst/>
             </a:pPr>
             <a:r>
-              <a:rPr kumimoji="0" lang="en-US" altLang="en-US" sz="2000" b="0" i="0" u="none" strike="noStrike" cap="none" normalizeH="0" baseline="0" dirty="0">
-                <a:ln>
-                  <a:noFill/>
-                </a:ln>
+              <a:rPr lang="en-US" altLang="en-US" dirty="0">
                 <a:solidFill>
                   <a:schemeClr val="tx1"/>
                 </a:solidFill>
-                <a:effectLst/>
-                <a:latin typeface="Arial" panose="020B0604020202020204" pitchFamily="34" charset="0"/>
+                <a:latin typeface="Times New Roman" panose="02020603050405020304" pitchFamily="18" charset="0"/>
+                <a:cs typeface="Times New Roman" panose="02020603050405020304" pitchFamily="18" charset="0"/>
               </a:rPr>
-              <a:t>Evaluate and compare model performance using accuracy and confusion matrix metrics.</a:t>
+              <a:t>Completed Excel for Business Analytics certification on Coursera.</a:t>
             </a:r>
           </a:p>
           <a:p>
-            <a:pPr marL="0" marR="0" lvl="0" indent="0" algn="just" defTabSz="914400" rtl="0" eaLnBrk="0" fontAlgn="base" latinLnBrk="0" hangingPunct="0">
+            <a:pPr marL="0" lvl="0" indent="0" eaLnBrk="0" fontAlgn="base" hangingPunct="0">
               <a:lnSpc>
                 <a:spcPct val="100000"/>
               </a:lnSpc>
@@ -8714,59 +6189,21 @@
               <a:buSzTx/>
               <a:buFontTx/>
               <a:buChar char="•"/>
-              <a:tabLst/>
             </a:pPr>
-            <a:r>
-              <a:rPr kumimoji="0" lang="en-US" altLang="en-US" sz="2000" b="0" i="0" u="none" strike="noStrike" cap="none" normalizeH="0" baseline="0" dirty="0">
-                <a:ln>
-                  <a:noFill/>
-                </a:ln>
-                <a:solidFill>
-                  <a:schemeClr val="tx1"/>
-                </a:solidFill>
-                <a:effectLst/>
-                <a:latin typeface="Arial" panose="020B0604020202020204" pitchFamily="34" charset="0"/>
-              </a:rPr>
-              <a:t>Enhance the user interface with clearer visual indicators and usability improvements.</a:t>
-            </a:r>
-          </a:p>
-          <a:p>
-            <a:pPr marL="0" marR="0" lvl="0" indent="0" algn="just" defTabSz="914400" rtl="0" eaLnBrk="0" fontAlgn="base" latinLnBrk="0" hangingPunct="0">
-              <a:lnSpc>
-                <a:spcPct val="100000"/>
-              </a:lnSpc>
-              <a:spcBef>
-                <a:spcPct val="0"/>
-              </a:spcBef>
-              <a:spcAft>
-                <a:spcPct val="0"/>
-              </a:spcAft>
-              <a:buClrTx/>
-              <a:buSzTx/>
-              <a:buFontTx/>
-              <a:buChar char="•"/>
-              <a:tabLst/>
-            </a:pPr>
-            <a:r>
-              <a:rPr kumimoji="0" lang="en-US" altLang="en-US" sz="2000" b="0" i="0" u="none" strike="noStrike" cap="none" normalizeH="0" baseline="0" dirty="0">
-                <a:ln>
-                  <a:noFill/>
-                </a:ln>
-                <a:solidFill>
-                  <a:schemeClr val="tx1"/>
-                </a:solidFill>
-                <a:effectLst/>
-                <a:latin typeface="Arial" panose="020B0604020202020204" pitchFamily="34" charset="0"/>
-              </a:rPr>
-              <a:t>Prepare detailed documentation, testing reports, and final project presentation.</a:t>
-            </a:r>
+            <a:endParaRPr lang="en-US" altLang="en-US" dirty="0">
+              <a:solidFill>
+                <a:schemeClr val="tx1"/>
+              </a:solidFill>
+              <a:latin typeface="Times New Roman" panose="02020603050405020304" pitchFamily="18" charset="0"/>
+              <a:cs typeface="Times New Roman" panose="02020603050405020304" pitchFamily="18" charset="0"/>
+            </a:endParaRPr>
           </a:p>
         </p:txBody>
       </p:sp>
     </p:spTree>
     <p:extLst>
       <p:ext uri="{BB962C8B-B14F-4D97-AF65-F5344CB8AC3E}">
-        <p14:creationId xmlns:p14="http://schemas.microsoft.com/office/powerpoint/2010/main" val="497921113"/>
+        <p14:creationId xmlns:p14="http://schemas.microsoft.com/office/powerpoint/2010/main" val="322678517"/>
       </p:ext>
     </p:extLst>
   </p:cSld>
